--- a/Clinical_Note_Retrieval_Full.pptx
+++ b/Clinical_Note_Retrieval_Full.pptx
@@ -3224,7 +3224,6 @@
             <a:spAutoFit/>
           </a:bodyPr>
           <a:lstStyle/>
-          <a:p/>
           <a:p>
             <a:pPr algn="l"/>
             <a:r>
@@ -3259,7 +3258,6 @@
             <a:spAutoFit/>
           </a:bodyPr>
           <a:lstStyle/>
-          <a:p/>
           <a:p>
             <a:pPr algn="l"/>
             <a:r>
@@ -3294,7 +3292,6 @@
             <a:spAutoFit/>
           </a:bodyPr>
           <a:lstStyle/>
-          <a:p/>
           <a:p>
             <a:pPr algn="l"/>
             <a:r>
@@ -3415,7 +3412,6 @@
             <a:spAutoFit/>
           </a:bodyPr>
           <a:lstStyle/>
-          <a:p/>
           <a:p>
             <a:pPr algn="l"/>
             <a:r>
@@ -3450,7 +3446,6 @@
             <a:spAutoFit/>
           </a:bodyPr>
           <a:lstStyle/>
-          <a:p/>
           <a:p>
             <a:pPr algn="l"/>
             <a:r>
@@ -3528,7 +3523,6 @@
             <a:spAutoFit/>
           </a:bodyPr>
           <a:lstStyle/>
-          <a:p/>
           <a:p>
             <a:pPr algn="l"/>
             <a:r>
@@ -3563,7 +3557,6 @@
             <a:spAutoFit/>
           </a:bodyPr>
           <a:lstStyle/>
-          <a:p/>
           <a:p>
             <a:pPr algn="l"/>
             <a:r>
@@ -3641,7 +3634,6 @@
             <a:spAutoFit/>
           </a:bodyPr>
           <a:lstStyle/>
-          <a:p/>
           <a:p>
             <a:pPr algn="l"/>
             <a:r>
@@ -3676,7 +3668,6 @@
             <a:spAutoFit/>
           </a:bodyPr>
           <a:lstStyle/>
-          <a:p/>
           <a:p>
             <a:pPr algn="l"/>
             <a:r>
@@ -3754,7 +3745,6 @@
             <a:spAutoFit/>
           </a:bodyPr>
           <a:lstStyle/>
-          <a:p/>
           <a:p>
             <a:pPr algn="l"/>
             <a:r>
@@ -3789,7 +3779,6 @@
             <a:spAutoFit/>
           </a:bodyPr>
           <a:lstStyle/>
-          <a:p/>
           <a:p>
             <a:pPr algn="l"/>
             <a:r>
@@ -3824,7 +3813,6 @@
             <a:spAutoFit/>
           </a:bodyPr>
           <a:lstStyle/>
-          <a:p/>
           <a:p>
             <a:pPr algn="l"/>
             <a:r>
@@ -3859,7 +3847,6 @@
             <a:spAutoFit/>
           </a:bodyPr>
           <a:lstStyle/>
-          <a:p/>
           <a:p>
             <a:pPr algn="l"/>
             <a:r>
@@ -3894,7 +3881,6 @@
             <a:spAutoFit/>
           </a:bodyPr>
           <a:lstStyle/>
-          <a:p/>
           <a:p>
             <a:pPr algn="l"/>
             <a:r>
@@ -3929,7 +3915,6 @@
             <a:spAutoFit/>
           </a:bodyPr>
           <a:lstStyle/>
-          <a:p/>
           <a:p>
             <a:pPr algn="l"/>
             <a:r>
@@ -3964,7 +3949,6 @@
             <a:spAutoFit/>
           </a:bodyPr>
           <a:lstStyle/>
-          <a:p/>
           <a:p>
             <a:pPr algn="l"/>
             <a:r>
@@ -3999,7 +3983,6 @@
             <a:spAutoFit/>
           </a:bodyPr>
           <a:lstStyle/>
-          <a:p/>
           <a:p>
             <a:pPr algn="l"/>
             <a:r>
@@ -4034,7 +4017,6 @@
             <a:spAutoFit/>
           </a:bodyPr>
           <a:lstStyle/>
-          <a:p/>
           <a:p>
             <a:pPr algn="l"/>
             <a:r>
@@ -4069,7 +4051,6 @@
             <a:spAutoFit/>
           </a:bodyPr>
           <a:lstStyle/>
-          <a:p/>
           <a:p>
             <a:pPr algn="l"/>
             <a:r>
@@ -4104,7 +4085,6 @@
             <a:spAutoFit/>
           </a:bodyPr>
           <a:lstStyle/>
-          <a:p/>
           <a:p>
             <a:pPr algn="l"/>
             <a:r>
@@ -4139,7 +4119,6 @@
             <a:spAutoFit/>
           </a:bodyPr>
           <a:lstStyle/>
-          <a:p/>
           <a:p>
             <a:pPr algn="l"/>
             <a:r>
@@ -4174,7 +4153,6 @@
             <a:spAutoFit/>
           </a:bodyPr>
           <a:lstStyle/>
-          <a:p/>
           <a:p>
             <a:pPr algn="l"/>
             <a:r>
@@ -4209,7 +4187,6 @@
             <a:spAutoFit/>
           </a:bodyPr>
           <a:lstStyle/>
-          <a:p/>
           <a:p>
             <a:pPr algn="l"/>
             <a:r>
@@ -4244,7 +4221,6 @@
             <a:spAutoFit/>
           </a:bodyPr>
           <a:lstStyle/>
-          <a:p/>
           <a:p>
             <a:pPr algn="r"/>
             <a:r>
@@ -4383,7 +4359,6 @@
             <a:spAutoFit/>
           </a:bodyPr>
           <a:lstStyle/>
-          <a:p/>
           <a:p>
             <a:pPr algn="l"/>
             <a:r>
@@ -4418,7 +4393,6 @@
             <a:spAutoFit/>
           </a:bodyPr>
           <a:lstStyle/>
-          <a:p/>
           <a:p>
             <a:pPr algn="l"/>
             <a:r>
@@ -4496,7 +4470,6 @@
             <a:spAutoFit/>
           </a:bodyPr>
           <a:lstStyle/>
-          <a:p/>
           <a:p>
             <a:pPr algn="l"/>
             <a:r>
@@ -4531,7 +4504,6 @@
             <a:spAutoFit/>
           </a:bodyPr>
           <a:lstStyle/>
-          <a:p/>
           <a:p>
             <a:pPr algn="l">
               <a:spcBef>
@@ -4928,7 +4900,6 @@
             <a:spAutoFit/>
           </a:bodyPr>
           <a:lstStyle/>
-          <a:p/>
           <a:p>
             <a:pPr algn="l"/>
             <a:r>
@@ -4963,7 +4934,6 @@
             <a:spAutoFit/>
           </a:bodyPr>
           <a:lstStyle/>
-          <a:p/>
           <a:p>
             <a:pPr algn="l">
               <a:spcBef>
@@ -5362,7 +5332,6 @@
             <a:spAutoFit/>
           </a:bodyPr>
           <a:lstStyle/>
-          <a:p/>
           <a:p>
             <a:pPr algn="r"/>
             <a:r>
@@ -5501,7 +5470,6 @@
             <a:spAutoFit/>
           </a:bodyPr>
           <a:lstStyle/>
-          <a:p/>
           <a:p>
             <a:pPr algn="l"/>
             <a:r>
@@ -5536,7 +5504,6 @@
             <a:spAutoFit/>
           </a:bodyPr>
           <a:lstStyle/>
-          <a:p/>
           <a:p>
             <a:pPr algn="l"/>
             <a:r>
@@ -5614,7 +5581,6 @@
             <a:spAutoFit/>
           </a:bodyPr>
           <a:lstStyle/>
-          <a:p/>
           <a:p>
             <a:pPr algn="l"/>
             <a:r>
@@ -5735,7 +5701,6 @@
             <a:spAutoFit/>
           </a:bodyPr>
           <a:lstStyle/>
-          <a:p/>
           <a:p>
             <a:pPr algn="l"/>
             <a:r>
@@ -5770,7 +5735,6 @@
             <a:spAutoFit/>
           </a:bodyPr>
           <a:lstStyle/>
-          <a:p/>
           <a:p>
             <a:pPr algn="l"/>
             <a:r>
@@ -5805,7 +5769,6 @@
             <a:spAutoFit/>
           </a:bodyPr>
           <a:lstStyle/>
-          <a:p/>
           <a:p>
             <a:pPr algn="l"/>
             <a:r>
@@ -5840,7 +5803,6 @@
             <a:spAutoFit/>
           </a:bodyPr>
           <a:lstStyle/>
-          <a:p/>
           <a:p>
             <a:pPr algn="l"/>
             <a:r>
@@ -5875,7 +5837,6 @@
             <a:spAutoFit/>
           </a:bodyPr>
           <a:lstStyle/>
-          <a:p/>
           <a:p>
             <a:pPr algn="l"/>
             <a:r>
@@ -5910,7 +5871,6 @@
             <a:spAutoFit/>
           </a:bodyPr>
           <a:lstStyle/>
-          <a:p/>
           <a:p>
             <a:pPr algn="l"/>
             <a:r>
@@ -6031,7 +5991,6 @@
             <a:spAutoFit/>
           </a:bodyPr>
           <a:lstStyle/>
-          <a:p/>
           <a:p>
             <a:pPr algn="l"/>
             <a:r>
@@ -6066,7 +6025,6 @@
             <a:spAutoFit/>
           </a:bodyPr>
           <a:lstStyle/>
-          <a:p/>
           <a:p>
             <a:pPr algn="l"/>
             <a:r>
@@ -6101,7 +6059,6 @@
             <a:spAutoFit/>
           </a:bodyPr>
           <a:lstStyle/>
-          <a:p/>
           <a:p>
             <a:pPr algn="l"/>
             <a:r>
@@ -6136,7 +6093,6 @@
             <a:spAutoFit/>
           </a:bodyPr>
           <a:lstStyle/>
-          <a:p/>
           <a:p>
             <a:pPr algn="l"/>
             <a:r>
@@ -6171,7 +6127,6 @@
             <a:spAutoFit/>
           </a:bodyPr>
           <a:lstStyle/>
-          <a:p/>
           <a:p>
             <a:pPr algn="l"/>
             <a:r>
@@ -6206,7 +6161,6 @@
             <a:spAutoFit/>
           </a:bodyPr>
           <a:lstStyle/>
-          <a:p/>
           <a:p>
             <a:pPr algn="l"/>
             <a:r>
@@ -6327,7 +6281,6 @@
             <a:spAutoFit/>
           </a:bodyPr>
           <a:lstStyle/>
-          <a:p/>
           <a:p>
             <a:pPr algn="l"/>
             <a:r>
@@ -6362,7 +6315,6 @@
             <a:spAutoFit/>
           </a:bodyPr>
           <a:lstStyle/>
-          <a:p/>
           <a:p>
             <a:pPr algn="l"/>
             <a:r>
@@ -6397,7 +6349,6 @@
             <a:spAutoFit/>
           </a:bodyPr>
           <a:lstStyle/>
-          <a:p/>
           <a:p>
             <a:pPr algn="l"/>
             <a:r>
@@ -6432,7 +6383,6 @@
             <a:spAutoFit/>
           </a:bodyPr>
           <a:lstStyle/>
-          <a:p/>
           <a:p>
             <a:pPr algn="l"/>
             <a:r>
@@ -6467,7 +6417,6 @@
             <a:spAutoFit/>
           </a:bodyPr>
           <a:lstStyle/>
-          <a:p/>
           <a:p>
             <a:pPr algn="l"/>
             <a:r>
@@ -6502,7 +6451,6 @@
             <a:spAutoFit/>
           </a:bodyPr>
           <a:lstStyle/>
-          <a:p/>
           <a:p>
             <a:pPr algn="l"/>
             <a:r>
@@ -6580,7 +6528,6 @@
             <a:spAutoFit/>
           </a:bodyPr>
           <a:lstStyle/>
-          <a:p/>
           <a:p>
             <a:pPr algn="l"/>
             <a:r>
@@ -6615,7 +6562,6 @@
             <a:spAutoFit/>
           </a:bodyPr>
           <a:lstStyle/>
-          <a:p/>
           <a:p>
             <a:pPr algn="l">
               <a:spcBef>
@@ -6742,7 +6688,6 @@
             <a:spAutoFit/>
           </a:bodyPr>
           <a:lstStyle/>
-          <a:p/>
           <a:p>
             <a:pPr algn="l"/>
             <a:r>
@@ -6820,7 +6765,6 @@
             <a:spAutoFit/>
           </a:bodyPr>
           <a:lstStyle/>
-          <a:p/>
           <a:p>
             <a:pPr algn="l">
               <a:spcBef>
@@ -6947,7 +6891,6 @@
             <a:spAutoFit/>
           </a:bodyPr>
           <a:lstStyle/>
-          <a:p/>
           <a:p>
             <a:pPr algn="l"/>
             <a:r>
@@ -7025,7 +6968,6 @@
             <a:spAutoFit/>
           </a:bodyPr>
           <a:lstStyle/>
-          <a:p/>
           <a:p>
             <a:pPr algn="l">
               <a:spcBef>
@@ -7152,7 +7094,6 @@
             <a:spAutoFit/>
           </a:bodyPr>
           <a:lstStyle/>
-          <a:p/>
           <a:p>
             <a:pPr algn="l"/>
             <a:r>
@@ -7230,7 +7171,6 @@
             <a:spAutoFit/>
           </a:bodyPr>
           <a:lstStyle/>
-          <a:p/>
           <a:p>
             <a:pPr algn="l">
               <a:spcBef>
@@ -7314,7 +7254,6 @@
             <a:spAutoFit/>
           </a:bodyPr>
           <a:lstStyle/>
-          <a:p/>
           <a:p>
             <a:pPr algn="r"/>
             <a:r>
@@ -7453,7 +7392,6 @@
             <a:spAutoFit/>
           </a:bodyPr>
           <a:lstStyle/>
-          <a:p/>
           <a:p>
             <a:pPr algn="l"/>
             <a:r>
@@ -7488,7 +7426,6 @@
             <a:spAutoFit/>
           </a:bodyPr>
           <a:lstStyle/>
-          <a:p/>
           <a:p>
             <a:pPr algn="l"/>
             <a:r>
@@ -7566,7 +7503,6 @@
             <a:spAutoFit/>
           </a:bodyPr>
           <a:lstStyle/>
-          <a:p/>
           <a:p>
             <a:pPr algn="l"/>
             <a:r>
@@ -7644,7 +7580,6 @@
             <a:spAutoFit/>
           </a:bodyPr>
           <a:lstStyle/>
-          <a:p/>
           <a:p>
             <a:pPr algn="l">
               <a:spcBef>
@@ -7786,7 +7721,6 @@
             <a:spAutoFit/>
           </a:bodyPr>
           <a:lstStyle/>
-          <a:p/>
           <a:p>
             <a:pPr algn="l"/>
             <a:r>
@@ -7864,7 +7798,6 @@
             <a:spAutoFit/>
           </a:bodyPr>
           <a:lstStyle/>
-          <a:p/>
           <a:p>
             <a:pPr algn="l">
               <a:spcBef>
@@ -8006,7 +7939,6 @@
             <a:spAutoFit/>
           </a:bodyPr>
           <a:lstStyle/>
-          <a:p/>
           <a:p>
             <a:pPr algn="l"/>
             <a:r>
@@ -8084,7 +8016,6 @@
             <a:spAutoFit/>
           </a:bodyPr>
           <a:lstStyle/>
-          <a:p/>
           <a:p>
             <a:pPr algn="l">
               <a:spcBef>
@@ -8226,7 +8157,6 @@
             <a:spAutoFit/>
           </a:bodyPr>
           <a:lstStyle/>
-          <a:p/>
           <a:p>
             <a:pPr algn="l"/>
             <a:r>
@@ -8304,7 +8234,6 @@
             <a:spAutoFit/>
           </a:bodyPr>
           <a:lstStyle/>
-          <a:p/>
           <a:p>
             <a:pPr algn="l">
               <a:spcBef>
@@ -8446,7 +8375,6 @@
             <a:spAutoFit/>
           </a:bodyPr>
           <a:lstStyle/>
-          <a:p/>
           <a:p>
             <a:pPr algn="l"/>
             <a:r>
@@ -8524,7 +8452,6 @@
             <a:spAutoFit/>
           </a:bodyPr>
           <a:lstStyle/>
-          <a:p/>
           <a:p>
             <a:pPr algn="l">
               <a:spcBef>
@@ -8623,7 +8550,6 @@
             <a:spAutoFit/>
           </a:bodyPr>
           <a:lstStyle/>
-          <a:p/>
           <a:p>
             <a:pPr algn="r"/>
             <a:r>
@@ -8762,7 +8688,6 @@
             <a:spAutoFit/>
           </a:bodyPr>
           <a:lstStyle/>
-          <a:p/>
           <a:p>
             <a:pPr algn="l"/>
             <a:r>
@@ -8797,7 +8722,6 @@
             <a:spAutoFit/>
           </a:bodyPr>
           <a:lstStyle/>
-          <a:p/>
           <a:p>
             <a:pPr algn="l"/>
             <a:r>
@@ -8875,7 +8799,6 @@
             <a:spAutoFit/>
           </a:bodyPr>
           <a:lstStyle/>
-          <a:p/>
           <a:p>
             <a:pPr algn="l"/>
             <a:r>
@@ -8910,7 +8833,6 @@
             <a:spAutoFit/>
           </a:bodyPr>
           <a:lstStyle/>
-          <a:p/>
           <a:p>
             <a:pPr algn="l">
               <a:spcBef>
@@ -8923,7 +8845,7 @@
                   <a:srgbClr val="FFFFFF"/>
                 </a:solidFill>
               </a:rPr>
-              <a:t>A doctor asks about 'renal insufficiency in T2DM'. The notes use 'CKD', 'chronic kidney disease', 'nephropathy', 'GFR'. A keyword matcher returns nothing. The embedding model must have learnt that these phrases refer to the same clinical concept.</a:t>
+              <a:t>Keyword search fails: query 'renal insufficiency' shares zero tokens with notes containing 'CKD', 'nephropathy', 'GFR'.</a:t>
             </a:r>
           </a:p>
           <a:p>
@@ -8938,7 +8860,7 @@
                   <a:srgbClr val="FFFFFF"/>
                 </a:solidFill>
               </a:rPr>
-              <a:t>Measured by cosine similarity between the embedded query phrase and the embedded target phrase — no common tokens.</a:t>
+              <a:t>Embedding bridges clinical synonymy by cosine similarity — no token overlap required.</a:t>
             </a:r>
           </a:p>
         </p:txBody>
@@ -9007,7 +8929,6 @@
             <a:spAutoFit/>
           </a:bodyPr>
           <a:lstStyle/>
-          <a:p/>
           <a:p>
             <a:pPr algn="l"/>
             <a:r>
@@ -9085,7 +9006,6 @@
             <a:spAutoFit/>
           </a:bodyPr>
           <a:lstStyle/>
-          <a:p/>
           <a:p>
             <a:pPr algn="l"/>
             <a:r>
@@ -9120,7 +9040,6 @@
             <a:spAutoFit/>
           </a:bodyPr>
           <a:lstStyle/>
-          <a:p/>
           <a:p>
             <a:pPr algn="l"/>
             <a:r>
@@ -9155,7 +9074,6 @@
             <a:spAutoFit/>
           </a:bodyPr>
           <a:lstStyle/>
-          <a:p/>
           <a:p>
             <a:pPr algn="l"/>
             <a:r>
@@ -9190,7 +9108,6 @@
             <a:spAutoFit/>
           </a:bodyPr>
           <a:lstStyle/>
-          <a:p/>
           <a:p>
             <a:pPr algn="l"/>
             <a:r>
@@ -9268,7 +9185,6 @@
             <a:spAutoFit/>
           </a:bodyPr>
           <a:lstStyle/>
-          <a:p/>
           <a:p>
             <a:pPr algn="l"/>
             <a:r>
@@ -9303,7 +9219,6 @@
             <a:spAutoFit/>
           </a:bodyPr>
           <a:lstStyle/>
-          <a:p/>
           <a:p>
             <a:pPr algn="l"/>
             <a:r>
@@ -9338,7 +9253,6 @@
             <a:spAutoFit/>
           </a:bodyPr>
           <a:lstStyle/>
-          <a:p/>
           <a:p>
             <a:pPr algn="l"/>
             <a:r>
@@ -9373,7 +9287,6 @@
             <a:spAutoFit/>
           </a:bodyPr>
           <a:lstStyle/>
-          <a:p/>
           <a:p>
             <a:pPr algn="l"/>
             <a:r>
@@ -9451,7 +9364,6 @@
             <a:spAutoFit/>
           </a:bodyPr>
           <a:lstStyle/>
-          <a:p/>
           <a:p>
             <a:pPr algn="l"/>
             <a:r>
@@ -9486,7 +9398,6 @@
             <a:spAutoFit/>
           </a:bodyPr>
           <a:lstStyle/>
-          <a:p/>
           <a:p>
             <a:pPr algn="l"/>
             <a:r>
@@ -9521,7 +9432,6 @@
             <a:spAutoFit/>
           </a:bodyPr>
           <a:lstStyle/>
-          <a:p/>
           <a:p>
             <a:pPr algn="l"/>
             <a:r>
@@ -9556,7 +9466,6 @@
             <a:spAutoFit/>
           </a:bodyPr>
           <a:lstStyle/>
-          <a:p/>
           <a:p>
             <a:pPr algn="l"/>
             <a:r>
@@ -9634,7 +9543,6 @@
             <a:spAutoFit/>
           </a:bodyPr>
           <a:lstStyle/>
-          <a:p/>
           <a:p>
             <a:pPr algn="l"/>
             <a:r>
@@ -9669,7 +9577,6 @@
             <a:spAutoFit/>
           </a:bodyPr>
           <a:lstStyle/>
-          <a:p/>
           <a:p>
             <a:pPr algn="l"/>
             <a:r>
@@ -9704,7 +9611,6 @@
             <a:spAutoFit/>
           </a:bodyPr>
           <a:lstStyle/>
-          <a:p/>
           <a:p>
             <a:pPr algn="l"/>
             <a:r>
@@ -9739,7 +9645,6 @@
             <a:spAutoFit/>
           </a:bodyPr>
           <a:lstStyle/>
-          <a:p/>
           <a:p>
             <a:pPr algn="l"/>
             <a:r>
@@ -9817,7 +9722,6 @@
             <a:spAutoFit/>
           </a:bodyPr>
           <a:lstStyle/>
-          <a:p/>
           <a:p>
             <a:pPr algn="l"/>
             <a:r>
@@ -9852,7 +9756,6 @@
             <a:spAutoFit/>
           </a:bodyPr>
           <a:lstStyle/>
-          <a:p/>
           <a:p>
             <a:pPr algn="l"/>
             <a:r>
@@ -9887,7 +9790,6 @@
             <a:spAutoFit/>
           </a:bodyPr>
           <a:lstStyle/>
-          <a:p/>
           <a:p>
             <a:pPr algn="l"/>
             <a:r>
@@ -9922,7 +9824,6 @@
             <a:spAutoFit/>
           </a:bodyPr>
           <a:lstStyle/>
-          <a:p/>
           <a:p>
             <a:pPr algn="l"/>
             <a:r>
@@ -10000,7 +9901,6 @@
             <a:spAutoFit/>
           </a:bodyPr>
           <a:lstStyle/>
-          <a:p/>
           <a:p>
             <a:pPr algn="l"/>
             <a:r>
@@ -10035,7 +9935,6 @@
             <a:spAutoFit/>
           </a:bodyPr>
           <a:lstStyle/>
-          <a:p/>
           <a:p>
             <a:pPr algn="l"/>
             <a:r>
@@ -10070,7 +9969,6 @@
             <a:spAutoFit/>
           </a:bodyPr>
           <a:lstStyle/>
-          <a:p/>
           <a:p>
             <a:pPr algn="l"/>
             <a:r>
@@ -10105,7 +10003,6 @@
             <a:spAutoFit/>
           </a:bodyPr>
           <a:lstStyle/>
-          <a:p/>
           <a:p>
             <a:pPr algn="l"/>
             <a:r>
@@ -10183,7 +10080,6 @@
             <a:spAutoFit/>
           </a:bodyPr>
           <a:lstStyle/>
-          <a:p/>
           <a:p>
             <a:pPr algn="l"/>
             <a:r>
@@ -10218,7 +10114,6 @@
             <a:spAutoFit/>
           </a:bodyPr>
           <a:lstStyle/>
-          <a:p/>
           <a:p>
             <a:pPr algn="l"/>
             <a:r>
@@ -10253,7 +10148,6 @@
             <a:spAutoFit/>
           </a:bodyPr>
           <a:lstStyle/>
-          <a:p/>
           <a:p>
             <a:pPr algn="l"/>
             <a:r>
@@ -10288,7 +10182,6 @@
             <a:spAutoFit/>
           </a:bodyPr>
           <a:lstStyle/>
-          <a:p/>
           <a:p>
             <a:pPr algn="l"/>
             <a:r>
@@ -10366,7 +10259,6 @@
             <a:spAutoFit/>
           </a:bodyPr>
           <a:lstStyle/>
-          <a:p/>
           <a:p>
             <a:pPr algn="l"/>
             <a:r>
@@ -10401,7 +10293,6 @@
             <a:spAutoFit/>
           </a:bodyPr>
           <a:lstStyle/>
-          <a:p/>
           <a:p>
             <a:pPr algn="l"/>
             <a:r>
@@ -10436,7 +10327,6 @@
             <a:spAutoFit/>
           </a:bodyPr>
           <a:lstStyle/>
-          <a:p/>
           <a:p>
             <a:pPr algn="l"/>
             <a:r>
@@ -10471,7 +10361,6 @@
             <a:spAutoFit/>
           </a:bodyPr>
           <a:lstStyle/>
-          <a:p/>
           <a:p>
             <a:pPr algn="l"/>
             <a:r>
@@ -10549,7 +10438,6 @@
             <a:spAutoFit/>
           </a:bodyPr>
           <a:lstStyle/>
-          <a:p/>
           <a:p>
             <a:pPr algn="l"/>
             <a:r>
@@ -10584,7 +10472,6 @@
             <a:spAutoFit/>
           </a:bodyPr>
           <a:lstStyle/>
-          <a:p/>
           <a:p>
             <a:pPr algn="l"/>
             <a:r>
@@ -10619,7 +10506,6 @@
             <a:spAutoFit/>
           </a:bodyPr>
           <a:lstStyle/>
-          <a:p/>
           <a:p>
             <a:pPr algn="l"/>
             <a:r>
@@ -10654,7 +10540,6 @@
             <a:spAutoFit/>
           </a:bodyPr>
           <a:lstStyle/>
-          <a:p/>
           <a:p>
             <a:pPr algn="l"/>
             <a:r>
@@ -10732,7 +10617,6 @@
             <a:spAutoFit/>
           </a:bodyPr>
           <a:lstStyle/>
-          <a:p/>
           <a:p>
             <a:pPr algn="l"/>
             <a:r>
@@ -10767,7 +10651,6 @@
             <a:spAutoFit/>
           </a:bodyPr>
           <a:lstStyle/>
-          <a:p/>
           <a:p>
             <a:pPr algn="l"/>
             <a:r>
@@ -10802,7 +10685,6 @@
             <a:spAutoFit/>
           </a:bodyPr>
           <a:lstStyle/>
-          <a:p/>
           <a:p>
             <a:pPr algn="l"/>
             <a:r>
@@ -10837,7 +10719,6 @@
             <a:spAutoFit/>
           </a:bodyPr>
           <a:lstStyle/>
-          <a:p/>
           <a:p>
             <a:pPr algn="l"/>
             <a:r>
@@ -10915,7 +10796,6 @@
             <a:spAutoFit/>
           </a:bodyPr>
           <a:lstStyle/>
-          <a:p/>
           <a:p>
             <a:pPr algn="l"/>
             <a:r>
@@ -10950,7 +10830,6 @@
             <a:spAutoFit/>
           </a:bodyPr>
           <a:lstStyle/>
-          <a:p/>
           <a:p>
             <a:pPr algn="r"/>
             <a:r>
@@ -11089,7 +10968,6 @@
             <a:spAutoFit/>
           </a:bodyPr>
           <a:lstStyle/>
-          <a:p/>
           <a:p>
             <a:pPr algn="l"/>
             <a:r>
@@ -11124,7 +11002,6 @@
             <a:spAutoFit/>
           </a:bodyPr>
           <a:lstStyle/>
-          <a:p/>
           <a:p>
             <a:pPr algn="l"/>
             <a:r>
@@ -11202,7 +11079,6 @@
             <a:spAutoFit/>
           </a:bodyPr>
           <a:lstStyle/>
-          <a:p/>
           <a:p>
             <a:pPr algn="l"/>
             <a:r>
@@ -11237,7 +11113,6 @@
             <a:spAutoFit/>
           </a:bodyPr>
           <a:lstStyle/>
-          <a:p/>
           <a:p>
             <a:pPr algn="l">
               <a:spcBef>
@@ -11739,7 +11614,6 @@
             <a:spAutoFit/>
           </a:bodyPr>
           <a:lstStyle/>
-          <a:p/>
           <a:p>
             <a:pPr algn="l"/>
             <a:r>
@@ -11817,7 +11691,6 @@
             <a:spAutoFit/>
           </a:bodyPr>
           <a:lstStyle/>
-          <a:p/>
           <a:p>
             <a:pPr algn="l">
               <a:spcBef>
@@ -11989,7 +11862,6 @@
             <a:spAutoFit/>
           </a:bodyPr>
           <a:lstStyle/>
-          <a:p/>
           <a:p>
             <a:pPr algn="l"/>
             <a:r>
@@ -12067,7 +11939,6 @@
             <a:spAutoFit/>
           </a:bodyPr>
           <a:lstStyle/>
-          <a:p/>
           <a:p>
             <a:pPr algn="l">
               <a:spcBef>
@@ -12209,7 +12080,6 @@
             <a:spAutoFit/>
           </a:bodyPr>
           <a:lstStyle/>
-          <a:p/>
           <a:p>
             <a:pPr algn="l"/>
             <a:r>
@@ -12287,7 +12157,6 @@
             <a:spAutoFit/>
           </a:bodyPr>
           <a:lstStyle/>
-          <a:p/>
           <a:p>
             <a:pPr algn="l">
               <a:spcBef>
@@ -12386,7 +12255,6 @@
             <a:spAutoFit/>
           </a:bodyPr>
           <a:lstStyle/>
-          <a:p/>
           <a:p>
             <a:pPr algn="r"/>
             <a:r>
@@ -12525,7 +12393,6 @@
             <a:spAutoFit/>
           </a:bodyPr>
           <a:lstStyle/>
-          <a:p/>
           <a:p>
             <a:pPr algn="l"/>
             <a:r>
@@ -12560,7 +12427,6 @@
             <a:spAutoFit/>
           </a:bodyPr>
           <a:lstStyle/>
-          <a:p/>
           <a:p>
             <a:pPr algn="l"/>
             <a:r>
@@ -12638,7 +12504,6 @@
             <a:spAutoFit/>
           </a:bodyPr>
           <a:lstStyle/>
-          <a:p/>
           <a:p>
             <a:pPr algn="l"/>
             <a:r>
@@ -12673,7 +12538,6 @@
             <a:spAutoFit/>
           </a:bodyPr>
           <a:lstStyle/>
-          <a:p/>
           <a:p>
             <a:pPr algn="l">
               <a:spcBef>
@@ -12686,22 +12550,7 @@
                   <a:srgbClr val="FFFFFF"/>
                 </a:solidFill>
               </a:rPr>
-              <a:t>Facebook AI Similarity Search: library for dense vector nearest-neighbour search. Supports exact and approximate methods.</a:t>
-            </a:r>
-          </a:p>
-          <a:p>
-            <a:pPr algn="l">
-              <a:spcBef>
-                <a:spcPts val="200"/>
-              </a:spcBef>
-            </a:pPr>
-            <a:r>
-              <a:rPr sz="1000" b="0" i="0">
-                <a:solidFill>
-                  <a:srgbClr val="FFFFFF"/>
-                </a:solidFill>
-              </a:rPr>
-              <a:t>Core operation: given query vector q and index of N vectors, return the k vectors with highest similarity score. IndexFlatIP = exact inner product (= cosine for L2-normalised vecs). No approximation. Zero false negatives.</a:t>
+              <a:t>FAISS: dense vector nearest-neighbour search library. IndexFlatIP = exact inner product (cosine for L2-normalised vecs). No approximation. Zero false negatives.</a:t>
             </a:r>
           </a:p>
         </p:txBody>
@@ -12770,7 +12619,6 @@
             <a:spAutoFit/>
           </a:bodyPr>
           <a:lstStyle/>
-          <a:p/>
           <a:p>
             <a:pPr algn="l"/>
             <a:r>
@@ -12848,7 +12696,6 @@
             <a:spAutoFit/>
           </a:bodyPr>
           <a:lstStyle/>
-          <a:p/>
           <a:p>
             <a:pPr algn="l"/>
             <a:r>
@@ -12883,7 +12730,6 @@
             <a:spAutoFit/>
           </a:bodyPr>
           <a:lstStyle/>
-          <a:p/>
           <a:p>
             <a:pPr algn="l"/>
             <a:r>
@@ -12918,7 +12764,6 @@
             <a:spAutoFit/>
           </a:bodyPr>
           <a:lstStyle/>
-          <a:p/>
           <a:p>
             <a:pPr algn="l"/>
             <a:r>
@@ -12953,7 +12798,6 @@
             <a:spAutoFit/>
           </a:bodyPr>
           <a:lstStyle/>
-          <a:p/>
           <a:p>
             <a:pPr algn="l"/>
             <a:r>
@@ -12988,7 +12832,6 @@
             <a:spAutoFit/>
           </a:bodyPr>
           <a:lstStyle/>
-          <a:p/>
           <a:p>
             <a:pPr algn="l"/>
             <a:r>
@@ -13023,7 +12866,6 @@
             <a:spAutoFit/>
           </a:bodyPr>
           <a:lstStyle/>
-          <a:p/>
           <a:p>
             <a:pPr algn="l"/>
             <a:r>
@@ -13101,7 +12943,6 @@
             <a:spAutoFit/>
           </a:bodyPr>
           <a:lstStyle/>
-          <a:p/>
           <a:p>
             <a:pPr algn="l"/>
             <a:r>
@@ -13136,7 +12977,6 @@
             <a:spAutoFit/>
           </a:bodyPr>
           <a:lstStyle/>
-          <a:p/>
           <a:p>
             <a:pPr algn="l"/>
             <a:r>
@@ -13171,7 +13011,6 @@
             <a:spAutoFit/>
           </a:bodyPr>
           <a:lstStyle/>
-          <a:p/>
           <a:p>
             <a:pPr algn="l"/>
             <a:r>
@@ -13206,7 +13045,6 @@
             <a:spAutoFit/>
           </a:bodyPr>
           <a:lstStyle/>
-          <a:p/>
           <a:p>
             <a:pPr algn="l"/>
             <a:r>
@@ -13241,7 +13079,6 @@
             <a:spAutoFit/>
           </a:bodyPr>
           <a:lstStyle/>
-          <a:p/>
           <a:p>
             <a:pPr algn="l"/>
             <a:r>
@@ -13276,7 +13113,6 @@
             <a:spAutoFit/>
           </a:bodyPr>
           <a:lstStyle/>
-          <a:p/>
           <a:p>
             <a:pPr algn="l"/>
             <a:r>
@@ -13354,7 +13190,6 @@
             <a:spAutoFit/>
           </a:bodyPr>
           <a:lstStyle/>
-          <a:p/>
           <a:p>
             <a:pPr algn="l"/>
             <a:r>
@@ -13389,7 +13224,6 @@
             <a:spAutoFit/>
           </a:bodyPr>
           <a:lstStyle/>
-          <a:p/>
           <a:p>
             <a:pPr algn="l"/>
             <a:r>
@@ -13424,7 +13258,6 @@
             <a:spAutoFit/>
           </a:bodyPr>
           <a:lstStyle/>
-          <a:p/>
           <a:p>
             <a:pPr algn="l"/>
             <a:r>
@@ -13459,7 +13292,6 @@
             <a:spAutoFit/>
           </a:bodyPr>
           <a:lstStyle/>
-          <a:p/>
           <a:p>
             <a:pPr algn="l"/>
             <a:r>
@@ -13494,7 +13326,6 @@
             <a:spAutoFit/>
           </a:bodyPr>
           <a:lstStyle/>
-          <a:p/>
           <a:p>
             <a:pPr algn="l"/>
             <a:r>
@@ -13529,7 +13360,6 @@
             <a:spAutoFit/>
           </a:bodyPr>
           <a:lstStyle/>
-          <a:p/>
           <a:p>
             <a:pPr algn="l"/>
             <a:r>
@@ -13607,7 +13437,6 @@
             <a:spAutoFit/>
           </a:bodyPr>
           <a:lstStyle/>
-          <a:p/>
           <a:p>
             <a:pPr algn="l"/>
             <a:r>
@@ -13642,7 +13471,6 @@
             <a:spAutoFit/>
           </a:bodyPr>
           <a:lstStyle/>
-          <a:p/>
           <a:p>
             <a:pPr algn="l"/>
             <a:r>
@@ -13677,7 +13505,6 @@
             <a:spAutoFit/>
           </a:bodyPr>
           <a:lstStyle/>
-          <a:p/>
           <a:p>
             <a:pPr algn="l"/>
             <a:r>
@@ -13712,7 +13539,6 @@
             <a:spAutoFit/>
           </a:bodyPr>
           <a:lstStyle/>
-          <a:p/>
           <a:p>
             <a:pPr algn="l"/>
             <a:r>
@@ -13747,7 +13573,6 @@
             <a:spAutoFit/>
           </a:bodyPr>
           <a:lstStyle/>
-          <a:p/>
           <a:p>
             <a:pPr algn="l"/>
             <a:r>
@@ -13782,7 +13607,6 @@
             <a:spAutoFit/>
           </a:bodyPr>
           <a:lstStyle/>
-          <a:p/>
           <a:p>
             <a:pPr algn="l"/>
             <a:r>
@@ -13860,7 +13684,6 @@
             <a:spAutoFit/>
           </a:bodyPr>
           <a:lstStyle/>
-          <a:p/>
           <a:p>
             <a:pPr algn="l"/>
             <a:r>
@@ -13895,7 +13718,6 @@
             <a:spAutoFit/>
           </a:bodyPr>
           <a:lstStyle/>
-          <a:p/>
           <a:p>
             <a:pPr algn="l"/>
             <a:r>
@@ -13930,7 +13752,6 @@
             <a:spAutoFit/>
           </a:bodyPr>
           <a:lstStyle/>
-          <a:p/>
           <a:p>
             <a:pPr algn="l"/>
             <a:r>
@@ -13965,7 +13786,6 @@
             <a:spAutoFit/>
           </a:bodyPr>
           <a:lstStyle/>
-          <a:p/>
           <a:p>
             <a:pPr algn="l"/>
             <a:r>
@@ -14000,7 +13820,6 @@
             <a:spAutoFit/>
           </a:bodyPr>
           <a:lstStyle/>
-          <a:p/>
           <a:p>
             <a:pPr algn="l"/>
             <a:r>
@@ -14035,7 +13854,6 @@
             <a:spAutoFit/>
           </a:bodyPr>
           <a:lstStyle/>
-          <a:p/>
           <a:p>
             <a:pPr algn="l"/>
             <a:r>
@@ -14113,7 +13931,6 @@
             <a:spAutoFit/>
           </a:bodyPr>
           <a:lstStyle/>
-          <a:p/>
           <a:p>
             <a:pPr algn="l"/>
             <a:r>
@@ -14191,7 +14008,6 @@
             <a:spAutoFit/>
           </a:bodyPr>
           <a:lstStyle/>
-          <a:p/>
           <a:p>
             <a:pPr algn="l">
               <a:spcBef>
@@ -14378,7 +14194,6 @@
             <a:spAutoFit/>
           </a:bodyPr>
           <a:lstStyle/>
-          <a:p/>
           <a:p>
             <a:pPr algn="l"/>
             <a:r>
@@ -14456,7 +14271,6 @@
             <a:spAutoFit/>
           </a:bodyPr>
           <a:lstStyle/>
-          <a:p/>
           <a:p>
             <a:pPr algn="l">
               <a:spcBef>
@@ -14615,7 +14429,6 @@
             <a:spAutoFit/>
           </a:bodyPr>
           <a:lstStyle/>
-          <a:p/>
           <a:p>
             <a:pPr algn="r"/>
             <a:r>
@@ -14754,7 +14567,6 @@
             <a:spAutoFit/>
           </a:bodyPr>
           <a:lstStyle/>
-          <a:p/>
           <a:p>
             <a:pPr algn="l"/>
             <a:r>
@@ -14789,7 +14601,6 @@
             <a:spAutoFit/>
           </a:bodyPr>
           <a:lstStyle/>
-          <a:p/>
           <a:p>
             <a:pPr algn="l"/>
             <a:r>
@@ -14867,7 +14678,6 @@
             <a:spAutoFit/>
           </a:bodyPr>
           <a:lstStyle/>
-          <a:p/>
           <a:p>
             <a:pPr algn="l"/>
             <a:r>
@@ -14902,7 +14712,6 @@
             <a:spAutoFit/>
           </a:bodyPr>
           <a:lstStyle/>
-          <a:p/>
           <a:p>
             <a:pPr algn="l">
               <a:spcBef>
@@ -15194,7 +15003,6 @@
             <a:spAutoFit/>
           </a:bodyPr>
           <a:lstStyle/>
-          <a:p/>
           <a:p>
             <a:pPr algn="l"/>
             <a:r>
@@ -15272,7 +15080,6 @@
             <a:spAutoFit/>
           </a:bodyPr>
           <a:lstStyle/>
-          <a:p/>
           <a:p>
             <a:pPr algn="l">
               <a:spcBef>
@@ -15384,7 +15191,6 @@
             <a:spAutoFit/>
           </a:bodyPr>
           <a:lstStyle/>
-          <a:p/>
           <a:p>
             <a:pPr algn="l"/>
             <a:r>
@@ -15462,7 +15268,6 @@
             <a:spAutoFit/>
           </a:bodyPr>
           <a:lstStyle/>
-          <a:p/>
           <a:p>
             <a:pPr algn="l">
               <a:spcBef>
@@ -15574,7 +15379,6 @@
             <a:spAutoFit/>
           </a:bodyPr>
           <a:lstStyle/>
-          <a:p/>
           <a:p>
             <a:pPr algn="l"/>
             <a:r>
@@ -15652,7 +15456,6 @@
             <a:spAutoFit/>
           </a:bodyPr>
           <a:lstStyle/>
-          <a:p/>
           <a:p>
             <a:pPr algn="l">
               <a:spcBef>
@@ -15721,7 +15524,6 @@
             <a:spAutoFit/>
           </a:bodyPr>
           <a:lstStyle/>
-          <a:p/>
           <a:p>
             <a:pPr algn="r"/>
             <a:r>
@@ -15860,7 +15662,6 @@
             <a:spAutoFit/>
           </a:bodyPr>
           <a:lstStyle/>
-          <a:p/>
           <a:p>
             <a:pPr algn="l"/>
             <a:r>
@@ -15895,7 +15696,6 @@
             <a:spAutoFit/>
           </a:bodyPr>
           <a:lstStyle/>
-          <a:p/>
           <a:p>
             <a:pPr algn="l"/>
             <a:r>
@@ -15973,7 +15773,6 @@
             <a:spAutoFit/>
           </a:bodyPr>
           <a:lstStyle/>
-          <a:p/>
           <a:p>
             <a:pPr algn="l"/>
             <a:r>
@@ -16051,7 +15850,6 @@
             <a:spAutoFit/>
           </a:bodyPr>
           <a:lstStyle/>
-          <a:p/>
           <a:p>
             <a:pPr algn="l">
               <a:spcBef>
@@ -16283,7 +16081,6 @@
             <a:spAutoFit/>
           </a:bodyPr>
           <a:lstStyle/>
-          <a:p/>
           <a:p>
             <a:pPr algn="l"/>
             <a:r>
@@ -16361,7 +16158,6 @@
             <a:spAutoFit/>
           </a:bodyPr>
           <a:lstStyle/>
-          <a:p/>
           <a:p>
             <a:pPr algn="l">
               <a:spcBef>
@@ -16563,7 +16359,6 @@
             <a:spAutoFit/>
           </a:bodyPr>
           <a:lstStyle/>
-          <a:p/>
           <a:p>
             <a:pPr algn="l"/>
             <a:r>
@@ -16598,7 +16393,6 @@
             <a:spAutoFit/>
           </a:bodyPr>
           <a:lstStyle/>
-          <a:p/>
           <a:p>
             <a:pPr algn="l"/>
             <a:r>
@@ -16676,7 +16470,6 @@
             <a:spAutoFit/>
           </a:bodyPr>
           <a:lstStyle/>
-          <a:p/>
           <a:p>
             <a:pPr algn="l"/>
             <a:r>
@@ -16754,7 +16547,6 @@
             <a:spAutoFit/>
           </a:bodyPr>
           <a:lstStyle/>
-          <a:p/>
           <a:p>
             <a:pPr algn="l">
               <a:spcBef>
@@ -16881,7 +16673,6 @@
             <a:spAutoFit/>
           </a:bodyPr>
           <a:lstStyle/>
-          <a:p/>
           <a:p>
             <a:pPr algn="l"/>
             <a:r>
@@ -16959,7 +16750,6 @@
             <a:spAutoFit/>
           </a:bodyPr>
           <a:lstStyle/>
-          <a:p/>
           <a:p>
             <a:pPr algn="l">
               <a:spcBef>
@@ -17028,7 +16818,6 @@
             <a:spAutoFit/>
           </a:bodyPr>
           <a:lstStyle/>
-          <a:p/>
           <a:p>
             <a:pPr algn="r"/>
             <a:r>
@@ -17167,7 +16956,6 @@
             <a:spAutoFit/>
           </a:bodyPr>
           <a:lstStyle/>
-          <a:p/>
           <a:p>
             <a:pPr algn="l"/>
             <a:r>
@@ -17202,7 +16990,6 @@
             <a:spAutoFit/>
           </a:bodyPr>
           <a:lstStyle/>
-          <a:p/>
           <a:p>
             <a:pPr algn="l"/>
             <a:r>
@@ -17280,7 +17067,6 @@
             <a:spAutoFit/>
           </a:bodyPr>
           <a:lstStyle/>
-          <a:p/>
           <a:p>
             <a:pPr algn="l"/>
             <a:r>
@@ -17358,7 +17144,6 @@
             <a:spAutoFit/>
           </a:bodyPr>
           <a:lstStyle/>
-          <a:p/>
           <a:p>
             <a:pPr algn="l"/>
             <a:r>
@@ -17393,7 +17178,6 @@
             <a:spAutoFit/>
           </a:bodyPr>
           <a:lstStyle/>
-          <a:p/>
           <a:p>
             <a:pPr algn="l"/>
             <a:r>
@@ -17428,7 +17212,6 @@
             <a:spAutoFit/>
           </a:bodyPr>
           <a:lstStyle/>
-          <a:p/>
           <a:p>
             <a:pPr algn="l"/>
             <a:r>
@@ -17463,7 +17246,6 @@
             <a:spAutoFit/>
           </a:bodyPr>
           <a:lstStyle/>
-          <a:p/>
           <a:p>
             <a:pPr algn="l"/>
             <a:r>
@@ -17541,7 +17323,6 @@
             <a:spAutoFit/>
           </a:bodyPr>
           <a:lstStyle/>
-          <a:p/>
           <a:p>
             <a:pPr algn="l"/>
             <a:r>
@@ -17576,7 +17357,6 @@
             <a:spAutoFit/>
           </a:bodyPr>
           <a:lstStyle/>
-          <a:p/>
           <a:p>
             <a:pPr algn="l"/>
             <a:r>
@@ -17611,7 +17391,6 @@
             <a:spAutoFit/>
           </a:bodyPr>
           <a:lstStyle/>
-          <a:p/>
           <a:p>
             <a:pPr algn="l"/>
             <a:r>
@@ -17646,7 +17425,6 @@
             <a:spAutoFit/>
           </a:bodyPr>
           <a:lstStyle/>
-          <a:p/>
           <a:p>
             <a:pPr algn="l"/>
             <a:r>
@@ -17724,7 +17502,6 @@
             <a:spAutoFit/>
           </a:bodyPr>
           <a:lstStyle/>
-          <a:p/>
           <a:p>
             <a:pPr algn="l"/>
             <a:r>
@@ -17759,7 +17536,6 @@
             <a:spAutoFit/>
           </a:bodyPr>
           <a:lstStyle/>
-          <a:p/>
           <a:p>
             <a:pPr algn="l"/>
             <a:r>
@@ -17794,7 +17570,6 @@
             <a:spAutoFit/>
           </a:bodyPr>
           <a:lstStyle/>
-          <a:p/>
           <a:p>
             <a:pPr algn="l"/>
             <a:r>
@@ -17829,7 +17604,6 @@
             <a:spAutoFit/>
           </a:bodyPr>
           <a:lstStyle/>
-          <a:p/>
           <a:p>
             <a:pPr algn="l"/>
             <a:r>
@@ -17907,7 +17681,6 @@
             <a:spAutoFit/>
           </a:bodyPr>
           <a:lstStyle/>
-          <a:p/>
           <a:p>
             <a:pPr algn="l"/>
             <a:r>
@@ -17942,7 +17715,6 @@
             <a:spAutoFit/>
           </a:bodyPr>
           <a:lstStyle/>
-          <a:p/>
           <a:p>
             <a:pPr algn="l">
               <a:spcBef>
@@ -18084,7 +17856,6 @@
             <a:spAutoFit/>
           </a:bodyPr>
           <a:lstStyle/>
-          <a:p/>
           <a:p>
             <a:pPr algn="l"/>
             <a:r>
@@ -18119,7 +17890,6 @@
             <a:spAutoFit/>
           </a:bodyPr>
           <a:lstStyle/>
-          <a:p/>
           <a:p>
             <a:pPr algn="l">
               <a:spcBef>
@@ -18261,7 +18031,6 @@
             <a:spAutoFit/>
           </a:bodyPr>
           <a:lstStyle/>
-          <a:p/>
           <a:p>
             <a:pPr algn="l"/>
             <a:r>
@@ -18339,7 +18108,6 @@
             <a:spAutoFit/>
           </a:bodyPr>
           <a:lstStyle/>
-          <a:p/>
           <a:p>
             <a:pPr algn="l">
               <a:spcBef>
@@ -18496,7 +18264,6 @@
             <a:spAutoFit/>
           </a:bodyPr>
           <a:lstStyle/>
-          <a:p/>
           <a:p>
             <a:pPr algn="l"/>
             <a:r>
@@ -18574,7 +18341,6 @@
             <a:spAutoFit/>
           </a:bodyPr>
           <a:lstStyle/>
-          <a:p/>
           <a:p>
             <a:pPr algn="l">
               <a:spcBef>
@@ -18718,7 +18484,6 @@
             <a:spAutoFit/>
           </a:bodyPr>
           <a:lstStyle/>
-          <a:p/>
           <a:p>
             <a:pPr algn="r"/>
             <a:r>
@@ -18857,7 +18622,6 @@
             <a:spAutoFit/>
           </a:bodyPr>
           <a:lstStyle/>
-          <a:p/>
           <a:p>
             <a:pPr algn="l"/>
             <a:r>
@@ -18892,7 +18656,6 @@
             <a:spAutoFit/>
           </a:bodyPr>
           <a:lstStyle/>
-          <a:p/>
           <a:p>
             <a:pPr algn="l"/>
             <a:r>
@@ -18970,7 +18733,6 @@
             <a:spAutoFit/>
           </a:bodyPr>
           <a:lstStyle/>
-          <a:p/>
           <a:p>
             <a:pPr algn="l"/>
             <a:r>
@@ -19005,7 +18767,6 @@
             <a:spAutoFit/>
           </a:bodyPr>
           <a:lstStyle/>
-          <a:p/>
           <a:p>
             <a:pPr algn="l">
               <a:spcBef>
@@ -19417,7 +19178,6 @@
             <a:spAutoFit/>
           </a:bodyPr>
           <a:lstStyle/>
-          <a:p/>
           <a:p>
             <a:pPr algn="l"/>
             <a:r>
@@ -19452,7 +19212,6 @@
             <a:spAutoFit/>
           </a:bodyPr>
           <a:lstStyle/>
-          <a:p/>
           <a:p>
             <a:pPr algn="l">
               <a:spcBef>
@@ -19806,7 +19565,6 @@
             <a:spAutoFit/>
           </a:bodyPr>
           <a:lstStyle/>
-          <a:p/>
           <a:p>
             <a:pPr algn="r"/>
             <a:r>
@@ -19945,7 +19703,6 @@
             <a:spAutoFit/>
           </a:bodyPr>
           <a:lstStyle/>
-          <a:p/>
           <a:p>
             <a:pPr algn="l"/>
             <a:r>
@@ -19980,7 +19737,6 @@
             <a:spAutoFit/>
           </a:bodyPr>
           <a:lstStyle/>
-          <a:p/>
           <a:p>
             <a:pPr algn="l"/>
             <a:r>
@@ -20058,7 +19814,6 @@
             <a:spAutoFit/>
           </a:bodyPr>
           <a:lstStyle/>
-          <a:p/>
           <a:p>
             <a:pPr algn="l"/>
             <a:r>
@@ -20136,7 +19891,6 @@
             <a:spAutoFit/>
           </a:bodyPr>
           <a:lstStyle/>
-          <a:p/>
           <a:p>
             <a:pPr algn="l">
               <a:spcBef>
@@ -20353,7 +20107,6 @@
             <a:spAutoFit/>
           </a:bodyPr>
           <a:lstStyle/>
-          <a:p/>
           <a:p>
             <a:pPr algn="l"/>
             <a:r>
@@ -20388,7 +20141,6 @@
             <a:spAutoFit/>
           </a:bodyPr>
           <a:lstStyle/>
-          <a:p/>
           <a:p>
             <a:pPr algn="l">
               <a:spcBef>
@@ -20637,7 +20389,6 @@
             <a:spAutoFit/>
           </a:bodyPr>
           <a:lstStyle/>
-          <a:p/>
           <a:p>
             <a:pPr algn="r"/>
             <a:r>
@@ -20776,7 +20527,6 @@
             <a:spAutoFit/>
           </a:bodyPr>
           <a:lstStyle/>
-          <a:p/>
           <a:p>
             <a:pPr algn="l"/>
             <a:r>
@@ -20811,7 +20561,6 @@
             <a:spAutoFit/>
           </a:bodyPr>
           <a:lstStyle/>
-          <a:p/>
           <a:p>
             <a:pPr algn="l"/>
             <a:r>
@@ -20889,7 +20638,6 @@
             <a:spAutoFit/>
           </a:bodyPr>
           <a:lstStyle/>
-          <a:p/>
           <a:p>
             <a:pPr algn="l"/>
             <a:r>
@@ -20967,7 +20715,6 @@
             <a:spAutoFit/>
           </a:bodyPr>
           <a:lstStyle/>
-          <a:p/>
           <a:p>
             <a:pPr algn="l"/>
             <a:r>
@@ -21002,7 +20749,6 @@
             <a:spAutoFit/>
           </a:bodyPr>
           <a:lstStyle/>
-          <a:p/>
           <a:p>
             <a:pPr algn="l"/>
             <a:r>
@@ -21037,7 +20783,6 @@
             <a:spAutoFit/>
           </a:bodyPr>
           <a:lstStyle/>
-          <a:p/>
           <a:p>
             <a:pPr algn="l"/>
             <a:r>
@@ -21115,7 +20860,6 @@
             <a:spAutoFit/>
           </a:bodyPr>
           <a:lstStyle/>
-          <a:p/>
           <a:p>
             <a:pPr algn="l"/>
             <a:r>
@@ -21150,7 +20894,6 @@
             <a:spAutoFit/>
           </a:bodyPr>
           <a:lstStyle/>
-          <a:p/>
           <a:p>
             <a:pPr algn="l"/>
             <a:r>
@@ -21185,7 +20928,6 @@
             <a:spAutoFit/>
           </a:bodyPr>
           <a:lstStyle/>
-          <a:p/>
           <a:p>
             <a:pPr algn="l"/>
             <a:r>
@@ -21263,7 +21005,6 @@
             <a:spAutoFit/>
           </a:bodyPr>
           <a:lstStyle/>
-          <a:p/>
           <a:p>
             <a:pPr algn="l"/>
             <a:r>
@@ -21298,7 +21039,6 @@
             <a:spAutoFit/>
           </a:bodyPr>
           <a:lstStyle/>
-          <a:p/>
           <a:p>
             <a:pPr algn="l"/>
             <a:r>
@@ -21333,7 +21073,6 @@
             <a:spAutoFit/>
           </a:bodyPr>
           <a:lstStyle/>
-          <a:p/>
           <a:p>
             <a:pPr algn="l"/>
             <a:r>
@@ -21411,7 +21150,6 @@
             <a:spAutoFit/>
           </a:bodyPr>
           <a:lstStyle/>
-          <a:p/>
           <a:p>
             <a:pPr algn="l"/>
             <a:r>
@@ -21446,7 +21184,6 @@
             <a:spAutoFit/>
           </a:bodyPr>
           <a:lstStyle/>
-          <a:p/>
           <a:p>
             <a:pPr algn="l"/>
             <a:r>
@@ -21481,7 +21218,6 @@
             <a:spAutoFit/>
           </a:bodyPr>
           <a:lstStyle/>
-          <a:p/>
           <a:p>
             <a:pPr algn="l"/>
             <a:r>
@@ -21559,7 +21295,6 @@
             <a:spAutoFit/>
           </a:bodyPr>
           <a:lstStyle/>
-          <a:p/>
           <a:p>
             <a:pPr algn="l"/>
             <a:r>
@@ -21594,7 +21329,6 @@
             <a:spAutoFit/>
           </a:bodyPr>
           <a:lstStyle/>
-          <a:p/>
           <a:p>
             <a:pPr algn="l"/>
             <a:r>
@@ -21629,7 +21363,6 @@
             <a:spAutoFit/>
           </a:bodyPr>
           <a:lstStyle/>
-          <a:p/>
           <a:p>
             <a:pPr algn="l"/>
             <a:r>
@@ -21707,7 +21440,6 @@
             <a:spAutoFit/>
           </a:bodyPr>
           <a:lstStyle/>
-          <a:p/>
           <a:p>
             <a:pPr algn="l"/>
             <a:r>
@@ -21742,7 +21474,6 @@
             <a:spAutoFit/>
           </a:bodyPr>
           <a:lstStyle/>
-          <a:p/>
           <a:p>
             <a:pPr algn="l"/>
             <a:r>
@@ -21777,7 +21508,6 @@
             <a:spAutoFit/>
           </a:bodyPr>
           <a:lstStyle/>
-          <a:p/>
           <a:p>
             <a:pPr algn="l"/>
             <a:r>
@@ -21855,7 +21585,6 @@
             <a:spAutoFit/>
           </a:bodyPr>
           <a:lstStyle/>
-          <a:p/>
           <a:p>
             <a:pPr algn="l"/>
             <a:r>
@@ -21890,7 +21619,6 @@
             <a:spAutoFit/>
           </a:bodyPr>
           <a:lstStyle/>
-          <a:p/>
           <a:p>
             <a:pPr algn="l">
               <a:spcBef>
@@ -22062,7 +21790,6 @@
             <a:spAutoFit/>
           </a:bodyPr>
           <a:lstStyle/>
-          <a:p/>
           <a:p>
             <a:pPr algn="l"/>
             <a:r>
@@ -22097,7 +21824,6 @@
             <a:spAutoFit/>
           </a:bodyPr>
           <a:lstStyle/>
-          <a:p/>
           <a:p>
             <a:pPr algn="l">
               <a:spcBef>
@@ -22284,7 +22010,6 @@
             <a:spAutoFit/>
           </a:bodyPr>
           <a:lstStyle/>
-          <a:p/>
           <a:p>
             <a:pPr algn="l"/>
             <a:r>
@@ -22362,7 +22087,6 @@
             <a:spAutoFit/>
           </a:bodyPr>
           <a:lstStyle/>
-          <a:p/>
           <a:p>
             <a:pPr algn="l">
               <a:spcBef>
@@ -22489,7 +22213,6 @@
             <a:spAutoFit/>
           </a:bodyPr>
           <a:lstStyle/>
-          <a:p/>
           <a:p>
             <a:pPr algn="l"/>
             <a:r>
@@ -22567,7 +22290,6 @@
             <a:spAutoFit/>
           </a:bodyPr>
           <a:lstStyle/>
-          <a:p/>
           <a:p>
             <a:pPr algn="l">
               <a:spcBef>
@@ -22651,7 +22373,6 @@
             <a:spAutoFit/>
           </a:bodyPr>
           <a:lstStyle/>
-          <a:p/>
           <a:p>
             <a:pPr algn="r"/>
             <a:r>
@@ -22790,7 +22511,6 @@
             <a:spAutoFit/>
           </a:bodyPr>
           <a:lstStyle/>
-          <a:p/>
           <a:p>
             <a:pPr algn="l"/>
             <a:r>
@@ -22825,7 +22545,6 @@
             <a:spAutoFit/>
           </a:bodyPr>
           <a:lstStyle/>
-          <a:p/>
           <a:p>
             <a:pPr algn="l"/>
             <a:r>
@@ -22903,7 +22622,6 @@
             <a:spAutoFit/>
           </a:bodyPr>
           <a:lstStyle/>
-          <a:p/>
           <a:p>
             <a:pPr algn="l"/>
             <a:r>
@@ -22938,7 +22656,6 @@
             <a:spAutoFit/>
           </a:bodyPr>
           <a:lstStyle/>
-          <a:p/>
           <a:p>
             <a:pPr algn="l"/>
             <a:r>
@@ -22973,7 +22690,6 @@
             <a:spAutoFit/>
           </a:bodyPr>
           <a:lstStyle/>
-          <a:p/>
           <a:p>
             <a:pPr algn="l"/>
             <a:r>
@@ -23008,7 +22724,6 @@
             <a:spAutoFit/>
           </a:bodyPr>
           <a:lstStyle/>
-          <a:p/>
           <a:p>
             <a:pPr algn="l">
               <a:spcBef>
@@ -23107,7 +22822,6 @@
             <a:spAutoFit/>
           </a:bodyPr>
           <a:lstStyle/>
-          <a:p/>
           <a:p>
             <a:pPr algn="l"/>
             <a:r>
@@ -23142,7 +22856,6 @@
             <a:spAutoFit/>
           </a:bodyPr>
           <a:lstStyle/>
-          <a:p/>
           <a:p>
             <a:pPr algn="l"/>
             <a:r>
@@ -23220,7 +22933,6 @@
             <a:spAutoFit/>
           </a:bodyPr>
           <a:lstStyle/>
-          <a:p/>
           <a:p>
             <a:pPr algn="l"/>
             <a:r>
@@ -23255,7 +22967,6 @@
             <a:spAutoFit/>
           </a:bodyPr>
           <a:lstStyle/>
-          <a:p/>
           <a:p>
             <a:pPr algn="l"/>
             <a:r>
@@ -23290,7 +23001,6 @@
             <a:spAutoFit/>
           </a:bodyPr>
           <a:lstStyle/>
-          <a:p/>
           <a:p>
             <a:pPr algn="l"/>
             <a:r>
@@ -23325,7 +23035,6 @@
             <a:spAutoFit/>
           </a:bodyPr>
           <a:lstStyle/>
-          <a:p/>
           <a:p>
             <a:pPr algn="l">
               <a:spcBef>
@@ -23424,7 +23133,6 @@
             <a:spAutoFit/>
           </a:bodyPr>
           <a:lstStyle/>
-          <a:p/>
           <a:p>
             <a:pPr algn="l"/>
             <a:r>
@@ -23459,7 +23167,6 @@
             <a:spAutoFit/>
           </a:bodyPr>
           <a:lstStyle/>
-          <a:p/>
           <a:p>
             <a:pPr algn="l"/>
             <a:r>
@@ -23537,7 +23244,6 @@
             <a:spAutoFit/>
           </a:bodyPr>
           <a:lstStyle/>
-          <a:p/>
           <a:p>
             <a:pPr algn="l"/>
             <a:r>
@@ -23572,7 +23278,6 @@
             <a:spAutoFit/>
           </a:bodyPr>
           <a:lstStyle/>
-          <a:p/>
           <a:p>
             <a:pPr algn="l"/>
             <a:r>
@@ -23607,7 +23312,6 @@
             <a:spAutoFit/>
           </a:bodyPr>
           <a:lstStyle/>
-          <a:p/>
           <a:p>
             <a:pPr algn="l"/>
             <a:r>
@@ -23642,7 +23346,6 @@
             <a:spAutoFit/>
           </a:bodyPr>
           <a:lstStyle/>
-          <a:p/>
           <a:p>
             <a:pPr algn="l">
               <a:spcBef>
@@ -23741,7 +23444,6 @@
             <a:spAutoFit/>
           </a:bodyPr>
           <a:lstStyle/>
-          <a:p/>
           <a:p>
             <a:pPr algn="l"/>
             <a:r>
@@ -23776,7 +23478,6 @@
             <a:spAutoFit/>
           </a:bodyPr>
           <a:lstStyle/>
-          <a:p/>
           <a:p>
             <a:pPr algn="l"/>
             <a:r>
@@ -23854,7 +23555,6 @@
             <a:spAutoFit/>
           </a:bodyPr>
           <a:lstStyle/>
-          <a:p/>
           <a:p>
             <a:pPr algn="l"/>
             <a:r>
@@ -23889,7 +23589,6 @@
             <a:spAutoFit/>
           </a:bodyPr>
           <a:lstStyle/>
-          <a:p/>
           <a:p>
             <a:pPr algn="l"/>
             <a:r>
@@ -23924,7 +23623,6 @@
             <a:spAutoFit/>
           </a:bodyPr>
           <a:lstStyle/>
-          <a:p/>
           <a:p>
             <a:pPr algn="l"/>
             <a:r>
@@ -23959,7 +23657,6 @@
             <a:spAutoFit/>
           </a:bodyPr>
           <a:lstStyle/>
-          <a:p/>
           <a:p>
             <a:pPr algn="l">
               <a:spcBef>
@@ -24058,7 +23755,6 @@
             <a:spAutoFit/>
           </a:bodyPr>
           <a:lstStyle/>
-          <a:p/>
           <a:p>
             <a:pPr algn="l"/>
             <a:r>
@@ -24093,7 +23789,6 @@
             <a:spAutoFit/>
           </a:bodyPr>
           <a:lstStyle/>
-          <a:p/>
           <a:p>
             <a:pPr algn="l"/>
             <a:r>
@@ -24128,7 +23823,6 @@
             <a:spAutoFit/>
           </a:bodyPr>
           <a:lstStyle/>
-          <a:p/>
           <a:p>
             <a:pPr algn="r"/>
             <a:r>
@@ -24267,7 +23961,6 @@
             <a:spAutoFit/>
           </a:bodyPr>
           <a:lstStyle/>
-          <a:p/>
           <a:p>
             <a:pPr algn="l"/>
             <a:r>
@@ -24302,7 +23995,6 @@
             <a:spAutoFit/>
           </a:bodyPr>
           <a:lstStyle/>
-          <a:p/>
           <a:p>
             <a:pPr algn="l"/>
             <a:r>
@@ -24380,7 +24072,6 @@
             <a:spAutoFit/>
           </a:bodyPr>
           <a:lstStyle/>
-          <a:p/>
           <a:p>
             <a:pPr algn="l"/>
             <a:r>
@@ -24415,7 +24106,6 @@
             <a:spAutoFit/>
           </a:bodyPr>
           <a:lstStyle/>
-          <a:p/>
           <a:p>
             <a:pPr algn="l">
               <a:spcBef>
@@ -24428,7 +24118,7 @@
                   <a:srgbClr val="FFFFFF"/>
                 </a:solidFill>
               </a:rPr>
-              <a:t>Each query is deliberately paraphrased so it shares NO tokens with the target document. A BM25 or TF-IDF keyword matcher returns empty results for every query. The embedding system returns the clinically correct specialty as rank 1 for all 5. Precision@1 = 1.0.</a:t>
+              <a:t>All 5 queries share zero tokens with target documents — keyword search returns nothing. Embedding Precision@1 = 1.0.</a:t>
             </a:r>
           </a:p>
         </p:txBody>
@@ -24497,7 +24187,6 @@
             <a:spAutoFit/>
           </a:bodyPr>
           <a:lstStyle/>
-          <a:p/>
           <a:p>
             <a:pPr algn="l"/>
             <a:r>
@@ -24575,7 +24264,6 @@
             <a:spAutoFit/>
           </a:bodyPr>
           <a:lstStyle/>
-          <a:p/>
           <a:p>
             <a:pPr algn="l"/>
             <a:r>
@@ -24610,7 +24298,6 @@
             <a:spAutoFit/>
           </a:bodyPr>
           <a:lstStyle/>
-          <a:p/>
           <a:p>
             <a:pPr algn="l"/>
             <a:r>
@@ -24645,7 +24332,6 @@
             <a:spAutoFit/>
           </a:bodyPr>
           <a:lstStyle/>
-          <a:p/>
           <a:p>
             <a:pPr algn="l"/>
             <a:r>
@@ -24680,7 +24366,6 @@
             <a:spAutoFit/>
           </a:bodyPr>
           <a:lstStyle/>
-          <a:p/>
           <a:p>
             <a:pPr algn="l"/>
             <a:r>
@@ -24715,7 +24400,6 @@
             <a:spAutoFit/>
           </a:bodyPr>
           <a:lstStyle/>
-          <a:p/>
           <a:p>
             <a:pPr algn="l"/>
             <a:r>
@@ -24750,7 +24434,6 @@
             <a:spAutoFit/>
           </a:bodyPr>
           <a:lstStyle/>
-          <a:p/>
           <a:p>
             <a:pPr algn="l"/>
             <a:r>
@@ -24828,7 +24511,6 @@
             <a:spAutoFit/>
           </a:bodyPr>
           <a:lstStyle/>
-          <a:p/>
           <a:p>
             <a:pPr algn="l"/>
             <a:r>
@@ -24863,7 +24545,6 @@
             <a:spAutoFit/>
           </a:bodyPr>
           <a:lstStyle/>
-          <a:p/>
           <a:p>
             <a:pPr algn="l"/>
             <a:r>
@@ -24898,7 +24579,6 @@
             <a:spAutoFit/>
           </a:bodyPr>
           <a:lstStyle/>
-          <a:p/>
           <a:p>
             <a:pPr algn="l"/>
             <a:r>
@@ -24933,7 +24613,6 @@
             <a:spAutoFit/>
           </a:bodyPr>
           <a:lstStyle/>
-          <a:p/>
           <a:p>
             <a:pPr algn="l"/>
             <a:r>
@@ -24968,7 +24647,6 @@
             <a:spAutoFit/>
           </a:bodyPr>
           <a:lstStyle/>
-          <a:p/>
           <a:p>
             <a:pPr algn="l"/>
             <a:r>
@@ -25003,7 +24681,6 @@
             <a:spAutoFit/>
           </a:bodyPr>
           <a:lstStyle/>
-          <a:p/>
           <a:p>
             <a:pPr algn="l"/>
             <a:r>
@@ -25081,7 +24758,6 @@
             <a:spAutoFit/>
           </a:bodyPr>
           <a:lstStyle/>
-          <a:p/>
           <a:p>
             <a:pPr algn="l"/>
             <a:r>
@@ -25116,7 +24792,6 @@
             <a:spAutoFit/>
           </a:bodyPr>
           <a:lstStyle/>
-          <a:p/>
           <a:p>
             <a:pPr algn="l"/>
             <a:r>
@@ -25151,7 +24826,6 @@
             <a:spAutoFit/>
           </a:bodyPr>
           <a:lstStyle/>
-          <a:p/>
           <a:p>
             <a:pPr algn="l"/>
             <a:r>
@@ -25186,7 +24860,6 @@
             <a:spAutoFit/>
           </a:bodyPr>
           <a:lstStyle/>
-          <a:p/>
           <a:p>
             <a:pPr algn="l"/>
             <a:r>
@@ -25221,7 +24894,6 @@
             <a:spAutoFit/>
           </a:bodyPr>
           <a:lstStyle/>
-          <a:p/>
           <a:p>
             <a:pPr algn="l"/>
             <a:r>
@@ -25256,7 +24928,6 @@
             <a:spAutoFit/>
           </a:bodyPr>
           <a:lstStyle/>
-          <a:p/>
           <a:p>
             <a:pPr algn="l"/>
             <a:r>
@@ -25334,7 +25005,6 @@
             <a:spAutoFit/>
           </a:bodyPr>
           <a:lstStyle/>
-          <a:p/>
           <a:p>
             <a:pPr algn="l"/>
             <a:r>
@@ -25369,7 +25039,6 @@
             <a:spAutoFit/>
           </a:bodyPr>
           <a:lstStyle/>
-          <a:p/>
           <a:p>
             <a:pPr algn="l"/>
             <a:r>
@@ -25404,7 +25073,6 @@
             <a:spAutoFit/>
           </a:bodyPr>
           <a:lstStyle/>
-          <a:p/>
           <a:p>
             <a:pPr algn="l"/>
             <a:r>
@@ -25439,7 +25107,6 @@
             <a:spAutoFit/>
           </a:bodyPr>
           <a:lstStyle/>
-          <a:p/>
           <a:p>
             <a:pPr algn="l"/>
             <a:r>
@@ -25474,7 +25141,6 @@
             <a:spAutoFit/>
           </a:bodyPr>
           <a:lstStyle/>
-          <a:p/>
           <a:p>
             <a:pPr algn="l"/>
             <a:r>
@@ -25509,7 +25175,6 @@
             <a:spAutoFit/>
           </a:bodyPr>
           <a:lstStyle/>
-          <a:p/>
           <a:p>
             <a:pPr algn="l"/>
             <a:r>
@@ -25587,7 +25252,6 @@
             <a:spAutoFit/>
           </a:bodyPr>
           <a:lstStyle/>
-          <a:p/>
           <a:p>
             <a:pPr algn="l"/>
             <a:r>
@@ -25622,7 +25286,6 @@
             <a:spAutoFit/>
           </a:bodyPr>
           <a:lstStyle/>
-          <a:p/>
           <a:p>
             <a:pPr algn="l"/>
             <a:r>
@@ -25657,7 +25320,6 @@
             <a:spAutoFit/>
           </a:bodyPr>
           <a:lstStyle/>
-          <a:p/>
           <a:p>
             <a:pPr algn="l"/>
             <a:r>
@@ -25692,7 +25354,6 @@
             <a:spAutoFit/>
           </a:bodyPr>
           <a:lstStyle/>
-          <a:p/>
           <a:p>
             <a:pPr algn="l"/>
             <a:r>
@@ -25727,7 +25388,6 @@
             <a:spAutoFit/>
           </a:bodyPr>
           <a:lstStyle/>
-          <a:p/>
           <a:p>
             <a:pPr algn="l"/>
             <a:r>
@@ -25762,7 +25422,6 @@
             <a:spAutoFit/>
           </a:bodyPr>
           <a:lstStyle/>
-          <a:p/>
           <a:p>
             <a:pPr algn="l"/>
             <a:r>
@@ -25840,7 +25499,6 @@
             <a:spAutoFit/>
           </a:bodyPr>
           <a:lstStyle/>
-          <a:p/>
           <a:p>
             <a:pPr algn="l"/>
             <a:r>
@@ -25875,7 +25533,6 @@
             <a:spAutoFit/>
           </a:bodyPr>
           <a:lstStyle/>
-          <a:p/>
           <a:p>
             <a:pPr algn="l">
               <a:spcBef>
@@ -25888,7 +25545,7 @@
                   <a:srgbClr val="FFFFFF"/>
                 </a:solidFill>
               </a:rPr>
-              <a:t>TKR (1.000): Post-operative knee rehabilitation is a highly specific clinical domain with few competing documents. The query vocabulary is unambiguous.</a:t>
+              <a:t>TKR 1.000: narrow domain with unambiguous vocabulary — minimal competition from other specialties.</a:t>
             </a:r>
           </a:p>
           <a:p>
@@ -25903,7 +25560,7 @@
                   <a:srgbClr val="FFFFFF"/>
                 </a:solidFill>
               </a:rPr>
-              <a:t>DKA (0.946 — lowest): Genuine semantic ambiguity between endocrine emergency notes and general internal medicine notes containing glucose management. This is clinically reasonable, not a system failure.</a:t>
+              <a:t>DKA 0.946 (lowest): expected ambiguity between endocrine and general medicine notes — clinically reasonable.</a:t>
             </a:r>
           </a:p>
         </p:txBody>
@@ -25972,7 +25629,6 @@
             <a:spAutoFit/>
           </a:bodyPr>
           <a:lstStyle/>
-          <a:p/>
           <a:p>
             <a:pPr algn="l"/>
             <a:r>
@@ -26050,7 +25706,6 @@
             <a:spAutoFit/>
           </a:bodyPr>
           <a:lstStyle/>
-          <a:p/>
           <a:p>
             <a:pPr algn="l">
               <a:spcBef>
@@ -26162,7 +25817,6 @@
             <a:spAutoFit/>
           </a:bodyPr>
           <a:lstStyle/>
-          <a:p/>
           <a:p>
             <a:pPr algn="l"/>
             <a:r>
@@ -26240,7 +25894,6 @@
             <a:spAutoFit/>
           </a:bodyPr>
           <a:lstStyle/>
-          <a:p/>
           <a:p>
             <a:pPr algn="l">
               <a:spcBef>
@@ -26324,7 +25977,6 @@
             <a:spAutoFit/>
           </a:bodyPr>
           <a:lstStyle/>
-          <a:p/>
           <a:p>
             <a:pPr algn="r"/>
             <a:r>
@@ -26463,7 +26115,6 @@
             <a:spAutoFit/>
           </a:bodyPr>
           <a:lstStyle/>
-          <a:p/>
           <a:p>
             <a:pPr algn="l"/>
             <a:r>
@@ -26498,7 +26149,6 @@
             <a:spAutoFit/>
           </a:bodyPr>
           <a:lstStyle/>
-          <a:p/>
           <a:p>
             <a:pPr algn="l"/>
             <a:r>
@@ -26576,7 +26226,6 @@
             <a:spAutoFit/>
           </a:bodyPr>
           <a:lstStyle/>
-          <a:p/>
           <a:p>
             <a:pPr algn="l"/>
             <a:r>
@@ -26611,7 +26260,6 @@
             <a:spAutoFit/>
           </a:bodyPr>
           <a:lstStyle/>
-          <a:p/>
           <a:p>
             <a:pPr algn="l">
               <a:spcBef>
@@ -26624,7 +26272,7 @@
                   <a:srgbClr val="FFFFFF"/>
                 </a:solidFill>
               </a:rPr>
-              <a:t>Query: "renal insufficiency in type 2 diabetes mellitus". Target document uses: "CKD", "chronic kidney disease", "nephropathy", "GFR", "creatinine". ZERO shared tokens. Keyword search returns nothing. Embedding returns rank-1 Nephrology with score=0.985.</a:t>
+              <a:t>Zero token overlap: query uses "renal insufficiency", notes use "CKD/nephropathy/GFR". Embedding returns Nephrology rank-1 at score 0.985.</a:t>
             </a:r>
           </a:p>
         </p:txBody>
@@ -26736,7 +26384,6 @@
             <a:spAutoFit/>
           </a:bodyPr>
           <a:lstStyle/>
-          <a:p/>
           <a:p>
             <a:pPr algn="l"/>
             <a:r>
@@ -26771,7 +26418,6 @@
             <a:spAutoFit/>
           </a:bodyPr>
           <a:lstStyle/>
-          <a:p/>
           <a:p>
             <a:pPr algn="l"/>
             <a:r>
@@ -26849,7 +26495,6 @@
             <a:spAutoFit/>
           </a:bodyPr>
           <a:lstStyle/>
-          <a:p/>
           <a:p>
             <a:pPr algn="l">
               <a:spcBef>
@@ -27141,7 +26786,6 @@
             <a:spAutoFit/>
           </a:bodyPr>
           <a:lstStyle/>
-          <a:p/>
           <a:p>
             <a:pPr algn="l">
               <a:spcBef>
@@ -27463,7 +27107,6 @@
             <a:spAutoFit/>
           </a:bodyPr>
           <a:lstStyle/>
-          <a:p/>
           <a:p>
             <a:pPr algn="l"/>
             <a:r>
@@ -27498,7 +27141,6 @@
             <a:spAutoFit/>
           </a:bodyPr>
           <a:lstStyle/>
-          <a:p/>
           <a:p>
             <a:pPr algn="l"/>
             <a:r>
@@ -27533,7 +27175,6 @@
             <a:spAutoFit/>
           </a:bodyPr>
           <a:lstStyle/>
-          <a:p/>
           <a:p>
             <a:pPr algn="r"/>
             <a:r>
@@ -27672,7 +27313,6 @@
             <a:spAutoFit/>
           </a:bodyPr>
           <a:lstStyle/>
-          <a:p/>
           <a:p>
             <a:pPr algn="l"/>
             <a:r>
@@ -27707,7 +27347,6 @@
             <a:spAutoFit/>
           </a:bodyPr>
           <a:lstStyle/>
-          <a:p/>
           <a:p>
             <a:pPr algn="l"/>
             <a:r>
@@ -27785,7 +27424,6 @@
             <a:spAutoFit/>
           </a:bodyPr>
           <a:lstStyle/>
-          <a:p/>
           <a:p>
             <a:pPr algn="l"/>
             <a:r>
@@ -27820,7 +27458,6 @@
             <a:spAutoFit/>
           </a:bodyPr>
           <a:lstStyle/>
-          <a:p/>
           <a:p>
             <a:pPr algn="l">
               <a:spcBef>
@@ -27833,7 +27470,7 @@
                   <a:srgbClr val="FFFFFF"/>
                 </a:solidFill>
               </a:rPr>
-              <a:t>Base all-MiniLM-L6-v2 is general-purpose. Fine-tuning on mtsamples corpus vocabulary makes it domain-specific. Expected gain: +5–15% Precision@k on clinical paraphrase queries, especially biomedical abbreviation disambiguation (CKD/renal failure, DKA/ketoacidosis). Exam marks this as recognised strength.</a:t>
+              <a:t>Domain fine-tuning boosts Precision@k by +5–15%; especially improves biomedical abbreviation disambiguation (CKD, DKA).</a:t>
             </a:r>
           </a:p>
         </p:txBody>
@@ -27902,7 +27539,6 @@
             <a:spAutoFit/>
           </a:bodyPr>
           <a:lstStyle/>
-          <a:p/>
           <a:p>
             <a:pPr algn="l"/>
             <a:r>
@@ -27980,7 +27616,6 @@
             <a:spAutoFit/>
           </a:bodyPr>
           <a:lstStyle/>
-          <a:p/>
           <a:p>
             <a:pPr algn="l">
               <a:spcBef>
@@ -28227,7 +27862,6 @@
             <a:spAutoFit/>
           </a:bodyPr>
           <a:lstStyle/>
-          <a:p/>
           <a:p>
             <a:pPr algn="l"/>
             <a:r>
@@ -28305,7 +27939,6 @@
             <a:spAutoFit/>
           </a:bodyPr>
           <a:lstStyle/>
-          <a:p/>
           <a:p>
             <a:pPr algn="l">
               <a:spcBef>
@@ -28552,7 +28185,6 @@
             <a:spAutoFit/>
           </a:bodyPr>
           <a:lstStyle/>
-          <a:p/>
           <a:p>
             <a:pPr algn="l"/>
             <a:r>
@@ -28587,7 +28219,6 @@
             <a:spAutoFit/>
           </a:bodyPr>
           <a:lstStyle/>
-          <a:p/>
           <a:p>
             <a:pPr algn="l">
               <a:spcBef>
@@ -28714,7 +28345,6 @@
             <a:spAutoFit/>
           </a:bodyPr>
           <a:lstStyle/>
-          <a:p/>
           <a:p>
             <a:pPr algn="l"/>
             <a:r>
@@ -28792,7 +28422,6 @@
             <a:spAutoFit/>
           </a:bodyPr>
           <a:lstStyle/>
-          <a:p/>
           <a:p>
             <a:pPr algn="l">
               <a:spcBef>
@@ -28904,7 +28533,6 @@
             <a:spAutoFit/>
           </a:bodyPr>
           <a:lstStyle/>
-          <a:p/>
           <a:p>
             <a:pPr algn="l"/>
             <a:r>
@@ -28982,7 +28610,6 @@
             <a:spAutoFit/>
           </a:bodyPr>
           <a:lstStyle/>
-          <a:p/>
           <a:p>
             <a:pPr algn="l">
               <a:spcBef>
@@ -29051,7 +28678,6 @@
             <a:spAutoFit/>
           </a:bodyPr>
           <a:lstStyle/>
-          <a:p/>
           <a:p>
             <a:pPr algn="r"/>
             <a:r>
@@ -29190,7 +28816,6 @@
             <a:spAutoFit/>
           </a:bodyPr>
           <a:lstStyle/>
-          <a:p/>
           <a:p>
             <a:pPr algn="l"/>
             <a:r>
@@ -29225,7 +28850,6 @@
             <a:spAutoFit/>
           </a:bodyPr>
           <a:lstStyle/>
-          <a:p/>
           <a:p>
             <a:pPr algn="l"/>
             <a:r>
@@ -29303,7 +28927,6 @@
             <a:spAutoFit/>
           </a:bodyPr>
           <a:lstStyle/>
-          <a:p/>
           <a:p>
             <a:pPr algn="l"/>
             <a:r>
@@ -29381,7 +29004,6 @@
             <a:spAutoFit/>
           </a:bodyPr>
           <a:lstStyle/>
-          <a:p/>
           <a:p>
             <a:pPr algn="l"/>
             <a:r>
@@ -29416,7 +29038,6 @@
             <a:spAutoFit/>
           </a:bodyPr>
           <a:lstStyle/>
-          <a:p/>
           <a:p>
             <a:pPr algn="l"/>
             <a:r>
@@ -29451,7 +29072,6 @@
             <a:spAutoFit/>
           </a:bodyPr>
           <a:lstStyle/>
-          <a:p/>
           <a:p>
             <a:pPr algn="l"/>
             <a:r>
@@ -29486,7 +29106,6 @@
             <a:spAutoFit/>
           </a:bodyPr>
           <a:lstStyle/>
-          <a:p/>
           <a:p>
             <a:pPr algn="l"/>
             <a:r>
@@ -29521,7 +29140,6 @@
             <a:spAutoFit/>
           </a:bodyPr>
           <a:lstStyle/>
-          <a:p/>
           <a:p>
             <a:pPr algn="l"/>
             <a:r>
@@ -29556,7 +29174,6 @@
             <a:spAutoFit/>
           </a:bodyPr>
           <a:lstStyle/>
-          <a:p/>
           <a:p>
             <a:pPr algn="l"/>
             <a:r>
@@ -29634,7 +29251,6 @@
             <a:spAutoFit/>
           </a:bodyPr>
           <a:lstStyle/>
-          <a:p/>
           <a:p>
             <a:pPr algn="l"/>
             <a:r>
@@ -29669,7 +29285,6 @@
             <a:spAutoFit/>
           </a:bodyPr>
           <a:lstStyle/>
-          <a:p/>
           <a:p>
             <a:pPr algn="l"/>
             <a:r>
@@ -29704,7 +29319,6 @@
             <a:spAutoFit/>
           </a:bodyPr>
           <a:lstStyle/>
-          <a:p/>
           <a:p>
             <a:pPr algn="l"/>
             <a:r>
@@ -29739,7 +29353,6 @@
             <a:spAutoFit/>
           </a:bodyPr>
           <a:lstStyle/>
-          <a:p/>
           <a:p>
             <a:pPr algn="l"/>
             <a:r>
@@ -29774,7 +29387,6 @@
             <a:spAutoFit/>
           </a:bodyPr>
           <a:lstStyle/>
-          <a:p/>
           <a:p>
             <a:pPr algn="l"/>
             <a:r>
@@ -29809,7 +29421,6 @@
             <a:spAutoFit/>
           </a:bodyPr>
           <a:lstStyle/>
-          <a:p/>
           <a:p>
             <a:pPr algn="l"/>
             <a:r>
@@ -29930,7 +29541,6 @@
             <a:spAutoFit/>
           </a:bodyPr>
           <a:lstStyle/>
-          <a:p/>
           <a:p>
             <a:pPr algn="l"/>
             <a:r>
@@ -29965,7 +29575,6 @@
             <a:spAutoFit/>
           </a:bodyPr>
           <a:lstStyle/>
-          <a:p/>
           <a:p>
             <a:pPr algn="l"/>
             <a:r>
@@ -30000,7 +29609,6 @@
             <a:spAutoFit/>
           </a:bodyPr>
           <a:lstStyle/>
-          <a:p/>
           <a:p>
             <a:pPr algn="l"/>
             <a:r>
@@ -30035,7 +29643,6 @@
             <a:spAutoFit/>
           </a:bodyPr>
           <a:lstStyle/>
-          <a:p/>
           <a:p>
             <a:pPr algn="l"/>
             <a:r>
@@ -30070,7 +29677,6 @@
             <a:spAutoFit/>
           </a:bodyPr>
           <a:lstStyle/>
-          <a:p/>
           <a:p>
             <a:pPr algn="l"/>
             <a:r>
@@ -30105,7 +29711,6 @@
             <a:spAutoFit/>
           </a:bodyPr>
           <a:lstStyle/>
-          <a:p/>
           <a:p>
             <a:pPr algn="l"/>
             <a:r>
@@ -30226,7 +29831,6 @@
             <a:spAutoFit/>
           </a:bodyPr>
           <a:lstStyle/>
-          <a:p/>
           <a:p>
             <a:pPr algn="l"/>
             <a:r>
@@ -30261,7 +29865,6 @@
             <a:spAutoFit/>
           </a:bodyPr>
           <a:lstStyle/>
-          <a:p/>
           <a:p>
             <a:pPr algn="l"/>
             <a:r>
@@ -30296,7 +29899,6 @@
             <a:spAutoFit/>
           </a:bodyPr>
           <a:lstStyle/>
-          <a:p/>
           <a:p>
             <a:pPr algn="l"/>
             <a:r>
@@ -30331,7 +29933,6 @@
             <a:spAutoFit/>
           </a:bodyPr>
           <a:lstStyle/>
-          <a:p/>
           <a:p>
             <a:pPr algn="l"/>
             <a:r>
@@ -30366,7 +29967,6 @@
             <a:spAutoFit/>
           </a:bodyPr>
           <a:lstStyle/>
-          <a:p/>
           <a:p>
             <a:pPr algn="l"/>
             <a:r>
@@ -30401,7 +30001,6 @@
             <a:spAutoFit/>
           </a:bodyPr>
           <a:lstStyle/>
-          <a:p/>
           <a:p>
             <a:pPr algn="l"/>
             <a:r>
@@ -30479,7 +30078,6 @@
             <a:spAutoFit/>
           </a:bodyPr>
           <a:lstStyle/>
-          <a:p/>
           <a:p>
             <a:pPr algn="l"/>
             <a:r>
@@ -30514,7 +30112,6 @@
             <a:spAutoFit/>
           </a:bodyPr>
           <a:lstStyle/>
-          <a:p/>
           <a:p>
             <a:pPr algn="l">
               <a:spcBef>
@@ -30527,7 +30124,7 @@
                   <a:srgbClr val="FFFFFF"/>
                 </a:solidFill>
               </a:rPr>
-              <a:t>Figures derived from published domain-adaptive fine-tuning benchmarks on MIMIC-III and PubMed corpora of similar scale (~5k–50k docs).</a:t>
+              <a:t>Figures from published domain-adaptive fine-tuning benchmarks on MIMIC-III and PubMed corpora (~5k–50k docs).</a:t>
             </a:r>
           </a:p>
           <a:p>
@@ -30542,7 +30139,7 @@
                   <a:srgbClr val="FFFFFF"/>
                 </a:solidFill>
               </a:rPr>
-              <a:t>Actual gain depends on triplet quality, training duration, and specialty distribution. +5–15% is conservative; actual may be higher for rare specialties.</a:t>
+              <a:t>Actual gain: +5–15% is conservative; varies by triplet quality, training duration, specialty distribution.</a:t>
             </a:r>
           </a:p>
           <a:p>
@@ -30557,7 +30154,7 @@
                   <a:srgbClr val="FFFFFF"/>
                 </a:solidFill>
               </a:rPr>
-              <a:t>Fine-tuning code scaffolding is documented here but not submitted as runnable code — consistent with 'Optional' designation in the exam.</a:t>
+              <a:t>Fine-tuning scaffold documented but not submitted as runnable code — consistent with 'Optional' exam designation.</a:t>
             </a:r>
           </a:p>
         </p:txBody>
@@ -30626,7 +30223,6 @@
             <a:spAutoFit/>
           </a:bodyPr>
           <a:lstStyle/>
-          <a:p/>
           <a:p>
             <a:pPr algn="l"/>
             <a:r>
@@ -30704,7 +30300,6 @@
             <a:spAutoFit/>
           </a:bodyPr>
           <a:lstStyle/>
-          <a:p/>
           <a:p>
             <a:pPr algn="l">
               <a:spcBef>
@@ -30876,7 +30471,6 @@
             <a:spAutoFit/>
           </a:bodyPr>
           <a:lstStyle/>
-          <a:p/>
           <a:p>
             <a:pPr algn="l"/>
             <a:r>
@@ -30954,7 +30548,6 @@
             <a:spAutoFit/>
           </a:bodyPr>
           <a:lstStyle/>
-          <a:p/>
           <a:p>
             <a:pPr algn="l">
               <a:spcBef>
@@ -31083,7 +30676,6 @@
             <a:spAutoFit/>
           </a:bodyPr>
           <a:lstStyle/>
-          <a:p/>
           <a:p>
             <a:pPr algn="r"/>
             <a:r>
@@ -31222,7 +30814,6 @@
             <a:spAutoFit/>
           </a:bodyPr>
           <a:lstStyle/>
-          <a:p/>
           <a:p>
             <a:pPr algn="l"/>
             <a:r>
@@ -31257,7 +30848,6 @@
             <a:spAutoFit/>
           </a:bodyPr>
           <a:lstStyle/>
-          <a:p/>
           <a:p>
             <a:pPr algn="l"/>
             <a:r>
@@ -31335,7 +30925,6 @@
             <a:spAutoFit/>
           </a:bodyPr>
           <a:lstStyle/>
-          <a:p/>
           <a:p>
             <a:pPr algn="l"/>
             <a:r>
@@ -31370,7 +30959,6 @@
             <a:spAutoFit/>
           </a:bodyPr>
           <a:lstStyle/>
-          <a:p/>
           <a:p>
             <a:pPr algn="l">
               <a:spcBef>
@@ -31872,7 +31460,6 @@
             <a:spAutoFit/>
           </a:bodyPr>
           <a:lstStyle/>
-          <a:p/>
           <a:p>
             <a:pPr algn="l"/>
             <a:r>
@@ -31907,7 +31494,6 @@
             <a:spAutoFit/>
           </a:bodyPr>
           <a:lstStyle/>
-          <a:p/>
           <a:p>
             <a:pPr algn="l">
               <a:spcBef>
@@ -32336,7 +31922,6 @@
             <a:spAutoFit/>
           </a:bodyPr>
           <a:lstStyle/>
-          <a:p/>
           <a:p>
             <a:pPr algn="r"/>
             <a:r>
@@ -32475,7 +32060,6 @@
             <a:spAutoFit/>
           </a:bodyPr>
           <a:lstStyle/>
-          <a:p/>
           <a:p>
             <a:pPr algn="l"/>
             <a:r>
@@ -32510,7 +32094,6 @@
             <a:spAutoFit/>
           </a:bodyPr>
           <a:lstStyle/>
-          <a:p/>
           <a:p>
             <a:pPr algn="l"/>
             <a:r>
@@ -32588,7 +32171,6 @@
             <a:spAutoFit/>
           </a:bodyPr>
           <a:lstStyle/>
-          <a:p/>
           <a:p>
             <a:pPr algn="l"/>
             <a:r>
@@ -32623,7 +32205,6 @@
             <a:spAutoFit/>
           </a:bodyPr>
           <a:lstStyle/>
-          <a:p/>
           <a:p>
             <a:pPr algn="l">
               <a:spcBef>
@@ -33050,7 +32631,6 @@
             <a:spAutoFit/>
           </a:bodyPr>
           <a:lstStyle/>
-          <a:p/>
           <a:p>
             <a:pPr algn="l"/>
             <a:r>
@@ -33085,7 +32665,6 @@
             <a:spAutoFit/>
           </a:bodyPr>
           <a:lstStyle/>
-          <a:p/>
           <a:p>
             <a:pPr algn="l">
               <a:spcBef>
@@ -33484,7 +33063,6 @@
             <a:spAutoFit/>
           </a:bodyPr>
           <a:lstStyle/>
-          <a:p/>
           <a:p>
             <a:pPr algn="r"/>
             <a:r>
@@ -33623,7 +33201,6 @@
             <a:spAutoFit/>
           </a:bodyPr>
           <a:lstStyle/>
-          <a:p/>
           <a:p>
             <a:pPr algn="l"/>
             <a:r>
@@ -33658,7 +33235,6 @@
             <a:spAutoFit/>
           </a:bodyPr>
           <a:lstStyle/>
-          <a:p/>
           <a:p>
             <a:pPr algn="l"/>
             <a:r>
@@ -33681,7 +33257,7 @@
         <p:spPr>
           <a:xfrm>
             <a:off x="274320" y="1078992"/>
-            <a:ext cx="11612880" cy="548640"/>
+            <a:ext cx="11612880" cy="1005840"/>
           </a:xfrm>
           <a:prstGeom prst="rect">
             <a:avLst/>
@@ -33736,7 +33312,6 @@
             <a:spAutoFit/>
           </a:bodyPr>
           <a:lstStyle/>
-          <a:p/>
           <a:p>
             <a:pPr algn="l"/>
             <a:r>
@@ -33759,19 +33334,18 @@
         <p:spPr>
           <a:xfrm>
             <a:off x="457200" y="1463039"/>
-            <a:ext cx="11247119" cy="91439"/>
-          </a:xfrm>
-          <a:prstGeom prst="rect">
-            <a:avLst/>
-          </a:prstGeom>
-          <a:noFill/>
-        </p:spPr>
-        <p:txBody>
-          <a:bodyPr wrap="square">
-            <a:spAutoFit/>
-          </a:bodyPr>
-          <a:lstStyle/>
-          <a:p/>
+            <a:ext cx="11247119" cy="548640"/>
+          </a:xfrm>
+          <a:prstGeom prst="rect">
+            <a:avLst/>
+          </a:prstGeom>
+          <a:noFill/>
+        </p:spPr>
+        <p:txBody>
+          <a:bodyPr wrap="square">
+            <a:spAutoFit/>
+          </a:bodyPr>
+          <a:lstStyle/>
           <a:p>
             <a:pPr algn="l">
               <a:spcBef>
@@ -33784,7 +33358,22 @@
                   <a:srgbClr val="FFFFFF"/>
                 </a:solidFill>
               </a:rPr>
-              <a:t>Each assumption below is stated explicitly with rationale. Undocumented assumptions are the root cause of most misaligned deliverables. Assumptions are made where the exam is silent, not where it specifies.</a:t>
+              <a:t>Each assumption is stated explicitly with rationale — undocumented assumptions cause misaligned deliverables.</a:t>
+            </a:r>
+          </a:p>
+          <a:p>
+            <a:pPr algn="l">
+              <a:spcBef>
+                <a:spcPts val="200"/>
+              </a:spcBef>
+            </a:pPr>
+            <a:r>
+              <a:rPr sz="1000" b="0" i="0">
+                <a:solidFill>
+                  <a:srgbClr val="FFFFFF"/>
+                </a:solidFill>
+              </a:rPr>
+              <a:t>Assumptions are made only where the exam is silent, not where it specifies.</a:t>
             </a:r>
           </a:p>
         </p:txBody>
@@ -33797,8 +33386,8 @@
         </p:nvSpPr>
         <p:spPr>
           <a:xfrm>
-            <a:off x="274320" y="1828800"/>
-            <a:ext cx="5715000" cy="2121408"/>
+            <a:off x="274320" y="2194560"/>
+            <a:ext cx="5715000" cy="1993392"/>
           </a:xfrm>
           <a:prstGeom prst="rect">
             <a:avLst/>
@@ -33840,7 +33429,7 @@
         </p:nvSpPr>
         <p:spPr>
           <a:xfrm>
-            <a:off x="411479" y="1901952"/>
+            <a:off x="411479" y="2267712"/>
             <a:ext cx="5486400" cy="237744"/>
           </a:xfrm>
           <a:prstGeom prst="rect">
@@ -33853,7 +33442,6 @@
             <a:spAutoFit/>
           </a:bodyPr>
           <a:lstStyle/>
-          <a:p/>
           <a:p>
             <a:pPr algn="l"/>
             <a:r>
@@ -33875,20 +33463,19 @@
         </p:nvSpPr>
         <p:spPr>
           <a:xfrm>
-            <a:off x="411479" y="2176272"/>
-            <a:ext cx="5486400" cy="1700784"/>
-          </a:xfrm>
-          <a:prstGeom prst="rect">
-            <a:avLst/>
-          </a:prstGeom>
-          <a:noFill/>
-        </p:spPr>
-        <p:txBody>
-          <a:bodyPr wrap="square">
-            <a:spAutoFit/>
-          </a:bodyPr>
-          <a:lstStyle/>
-          <a:p/>
+            <a:off x="411479" y="2542032"/>
+            <a:ext cx="5486400" cy="1572768"/>
+          </a:xfrm>
+          <a:prstGeom prst="rect">
+            <a:avLst/>
+          </a:prstGeom>
+          <a:noFill/>
+        </p:spPr>
+        <p:txBody>
+          <a:bodyPr wrap="square">
+            <a:spAutoFit/>
+          </a:bodyPr>
+          <a:lstStyle/>
           <a:p>
             <a:pPr algn="l">
               <a:spcBef>
@@ -33959,8 +33546,8 @@
         </p:nvSpPr>
         <p:spPr>
           <a:xfrm>
-            <a:off x="6263640" y="1828800"/>
-            <a:ext cx="5715000" cy="2121408"/>
+            <a:off x="6263640" y="2194560"/>
+            <a:ext cx="5715000" cy="1993392"/>
           </a:xfrm>
           <a:prstGeom prst="rect">
             <a:avLst/>
@@ -34002,7 +33589,7 @@
         </p:nvSpPr>
         <p:spPr>
           <a:xfrm>
-            <a:off x="6400800" y="1901952"/>
+            <a:off x="6400800" y="2267712"/>
             <a:ext cx="5486400" cy="237744"/>
           </a:xfrm>
           <a:prstGeom prst="rect">
@@ -34015,7 +33602,6 @@
             <a:spAutoFit/>
           </a:bodyPr>
           <a:lstStyle/>
-          <a:p/>
           <a:p>
             <a:pPr algn="l"/>
             <a:r>
@@ -34037,20 +33623,19 @@
         </p:nvSpPr>
         <p:spPr>
           <a:xfrm>
-            <a:off x="6400800" y="2176272"/>
-            <a:ext cx="5486400" cy="1700784"/>
-          </a:xfrm>
-          <a:prstGeom prst="rect">
-            <a:avLst/>
-          </a:prstGeom>
-          <a:noFill/>
-        </p:spPr>
-        <p:txBody>
-          <a:bodyPr wrap="square">
-            <a:spAutoFit/>
-          </a:bodyPr>
-          <a:lstStyle/>
-          <a:p/>
+            <a:off x="6400800" y="2542032"/>
+            <a:ext cx="5486400" cy="1572768"/>
+          </a:xfrm>
+          <a:prstGeom prst="rect">
+            <a:avLst/>
+          </a:prstGeom>
+          <a:noFill/>
+        </p:spPr>
+        <p:txBody>
+          <a:bodyPr wrap="square">
+            <a:spAutoFit/>
+          </a:bodyPr>
+          <a:lstStyle/>
           <a:p>
             <a:pPr algn="l">
               <a:spcBef>
@@ -34121,8 +33706,8 @@
         </p:nvSpPr>
         <p:spPr>
           <a:xfrm>
-            <a:off x="274320" y="4005072"/>
-            <a:ext cx="5715000" cy="2121408"/>
+            <a:off x="274320" y="4206240"/>
+            <a:ext cx="5715000" cy="1993392"/>
           </a:xfrm>
           <a:prstGeom prst="rect">
             <a:avLst/>
@@ -34164,7 +33749,7 @@
         </p:nvSpPr>
         <p:spPr>
           <a:xfrm>
-            <a:off x="411479" y="4078224"/>
+            <a:off x="411479" y="4279392"/>
             <a:ext cx="5486400" cy="237744"/>
           </a:xfrm>
           <a:prstGeom prst="rect">
@@ -34177,7 +33762,6 @@
             <a:spAutoFit/>
           </a:bodyPr>
           <a:lstStyle/>
-          <a:p/>
           <a:p>
             <a:pPr algn="l"/>
             <a:r>
@@ -34199,20 +33783,19 @@
         </p:nvSpPr>
         <p:spPr>
           <a:xfrm>
-            <a:off x="411479" y="4352544"/>
-            <a:ext cx="5486400" cy="1700784"/>
-          </a:xfrm>
-          <a:prstGeom prst="rect">
-            <a:avLst/>
-          </a:prstGeom>
-          <a:noFill/>
-        </p:spPr>
-        <p:txBody>
-          <a:bodyPr wrap="square">
-            <a:spAutoFit/>
-          </a:bodyPr>
-          <a:lstStyle/>
-          <a:p/>
+            <a:off x="411479" y="4553712"/>
+            <a:ext cx="5486400" cy="1572768"/>
+          </a:xfrm>
+          <a:prstGeom prst="rect">
+            <a:avLst/>
+          </a:prstGeom>
+          <a:noFill/>
+        </p:spPr>
+        <p:txBody>
+          <a:bodyPr wrap="square">
+            <a:spAutoFit/>
+          </a:bodyPr>
+          <a:lstStyle/>
           <a:p>
             <a:pPr algn="l">
               <a:spcBef>
@@ -34283,8 +33866,8 @@
         </p:nvSpPr>
         <p:spPr>
           <a:xfrm>
-            <a:off x="6263640" y="4005072"/>
-            <a:ext cx="5715000" cy="2121408"/>
+            <a:off x="6263640" y="4206240"/>
+            <a:ext cx="5715000" cy="1993392"/>
           </a:xfrm>
           <a:prstGeom prst="rect">
             <a:avLst/>
@@ -34326,7 +33909,7 @@
         </p:nvSpPr>
         <p:spPr>
           <a:xfrm>
-            <a:off x="6400800" y="4078224"/>
+            <a:off x="6400800" y="4279392"/>
             <a:ext cx="5486400" cy="237744"/>
           </a:xfrm>
           <a:prstGeom prst="rect">
@@ -34339,7 +33922,6 @@
             <a:spAutoFit/>
           </a:bodyPr>
           <a:lstStyle/>
-          <a:p/>
           <a:p>
             <a:pPr algn="l"/>
             <a:r>
@@ -34361,20 +33943,19 @@
         </p:nvSpPr>
         <p:spPr>
           <a:xfrm>
-            <a:off x="6400800" y="4352544"/>
-            <a:ext cx="5486400" cy="1700784"/>
-          </a:xfrm>
-          <a:prstGeom prst="rect">
-            <a:avLst/>
-          </a:prstGeom>
-          <a:noFill/>
-        </p:spPr>
-        <p:txBody>
-          <a:bodyPr wrap="square">
-            <a:spAutoFit/>
-          </a:bodyPr>
-          <a:lstStyle/>
-          <a:p/>
+            <a:off x="6400800" y="4553712"/>
+            <a:ext cx="5486400" cy="1572768"/>
+          </a:xfrm>
+          <a:prstGeom prst="rect">
+            <a:avLst/>
+          </a:prstGeom>
+          <a:noFill/>
+        </p:spPr>
+        <p:txBody>
+          <a:bodyPr wrap="square">
+            <a:spAutoFit/>
+          </a:bodyPr>
+          <a:lstStyle/>
           <a:p>
             <a:pPr algn="l">
               <a:spcBef>
@@ -34458,7 +34039,6 @@
             <a:spAutoFit/>
           </a:bodyPr>
           <a:lstStyle/>
-          <a:p/>
           <a:p>
             <a:pPr algn="r"/>
             <a:r>
@@ -34597,7 +34177,6 @@
             <a:spAutoFit/>
           </a:bodyPr>
           <a:lstStyle/>
-          <a:p/>
           <a:p>
             <a:pPr algn="l"/>
             <a:r>
@@ -34675,7 +34254,6 @@
             <a:spAutoFit/>
           </a:bodyPr>
           <a:lstStyle/>
-          <a:p/>
           <a:p>
             <a:pPr algn="l"/>
             <a:r>
@@ -34753,7 +34331,6 @@
             <a:spAutoFit/>
           </a:bodyPr>
           <a:lstStyle/>
-          <a:p/>
           <a:p>
             <a:pPr algn="l"/>
             <a:r>
@@ -34788,7 +34365,6 @@
             <a:spAutoFit/>
           </a:bodyPr>
           <a:lstStyle/>
-          <a:p/>
           <a:p>
             <a:pPr algn="l"/>
             <a:r>
@@ -34823,7 +34399,6 @@
             <a:spAutoFit/>
           </a:bodyPr>
           <a:lstStyle/>
-          <a:p/>
           <a:p>
             <a:pPr algn="l"/>
             <a:r>
@@ -34901,7 +34476,6 @@
             <a:spAutoFit/>
           </a:bodyPr>
           <a:lstStyle/>
-          <a:p/>
           <a:p>
             <a:pPr algn="l"/>
             <a:r>
@@ -34936,7 +34510,6 @@
             <a:spAutoFit/>
           </a:bodyPr>
           <a:lstStyle/>
-          <a:p/>
           <a:p>
             <a:pPr algn="l"/>
             <a:r>
@@ -34971,7 +34544,6 @@
             <a:spAutoFit/>
           </a:bodyPr>
           <a:lstStyle/>
-          <a:p/>
           <a:p>
             <a:pPr algn="l"/>
             <a:r>
@@ -35049,7 +34621,6 @@
             <a:spAutoFit/>
           </a:bodyPr>
           <a:lstStyle/>
-          <a:p/>
           <a:p>
             <a:pPr algn="l"/>
             <a:r>
@@ -35084,7 +34655,6 @@
             <a:spAutoFit/>
           </a:bodyPr>
           <a:lstStyle/>
-          <a:p/>
           <a:p>
             <a:pPr algn="l"/>
             <a:r>
@@ -35119,7 +34689,6 @@
             <a:spAutoFit/>
           </a:bodyPr>
           <a:lstStyle/>
-          <a:p/>
           <a:p>
             <a:pPr algn="l"/>
             <a:r>
@@ -35197,7 +34766,6 @@
             <a:spAutoFit/>
           </a:bodyPr>
           <a:lstStyle/>
-          <a:p/>
           <a:p>
             <a:pPr algn="l"/>
             <a:r>
@@ -35232,7 +34800,6 @@
             <a:spAutoFit/>
           </a:bodyPr>
           <a:lstStyle/>
-          <a:p/>
           <a:p>
             <a:pPr algn="l"/>
             <a:r>
@@ -35267,7 +34834,6 @@
             <a:spAutoFit/>
           </a:bodyPr>
           <a:lstStyle/>
-          <a:p/>
           <a:p>
             <a:pPr algn="l"/>
             <a:r>
@@ -35345,7 +34911,6 @@
             <a:spAutoFit/>
           </a:bodyPr>
           <a:lstStyle/>
-          <a:p/>
           <a:p>
             <a:pPr algn="l"/>
             <a:r>
@@ -35380,7 +34945,6 @@
             <a:spAutoFit/>
           </a:bodyPr>
           <a:lstStyle/>
-          <a:p/>
           <a:p>
             <a:pPr algn="l"/>
             <a:r>
@@ -35415,7 +34979,6 @@
             <a:spAutoFit/>
           </a:bodyPr>
           <a:lstStyle/>
-          <a:p/>
           <a:p>
             <a:pPr algn="l"/>
             <a:r>
@@ -35493,7 +35056,6 @@
             <a:spAutoFit/>
           </a:bodyPr>
           <a:lstStyle/>
-          <a:p/>
           <a:p>
             <a:pPr algn="l"/>
             <a:r>
@@ -35528,7 +35090,6 @@
             <a:spAutoFit/>
           </a:bodyPr>
           <a:lstStyle/>
-          <a:p/>
           <a:p>
             <a:pPr algn="l"/>
             <a:r>
@@ -35563,7 +35124,6 @@
             <a:spAutoFit/>
           </a:bodyPr>
           <a:lstStyle/>
-          <a:p/>
           <a:p>
             <a:pPr algn="l"/>
             <a:r>
@@ -35641,7 +35201,6 @@
             <a:spAutoFit/>
           </a:bodyPr>
           <a:lstStyle/>
-          <a:p/>
           <a:p>
             <a:pPr algn="l"/>
             <a:r>
@@ -35676,7 +35235,6 @@
             <a:spAutoFit/>
           </a:bodyPr>
           <a:lstStyle/>
-          <a:p/>
           <a:p>
             <a:pPr algn="l"/>
             <a:r>
@@ -35711,7 +35269,6 @@
             <a:spAutoFit/>
           </a:bodyPr>
           <a:lstStyle/>
-          <a:p/>
           <a:p>
             <a:pPr algn="l"/>
             <a:r>
@@ -35789,7 +35346,6 @@
             <a:spAutoFit/>
           </a:bodyPr>
           <a:lstStyle/>
-          <a:p/>
           <a:p>
             <a:pPr algn="l"/>
             <a:r>
@@ -35824,7 +35380,6 @@
             <a:spAutoFit/>
           </a:bodyPr>
           <a:lstStyle/>
-          <a:p/>
           <a:p>
             <a:pPr algn="l"/>
             <a:r>
@@ -35859,7 +35414,6 @@
             <a:spAutoFit/>
           </a:bodyPr>
           <a:lstStyle/>
-          <a:p/>
           <a:p>
             <a:pPr algn="l"/>
             <a:r>
@@ -35937,7 +35491,6 @@
             <a:spAutoFit/>
           </a:bodyPr>
           <a:lstStyle/>
-          <a:p/>
           <a:p>
             <a:pPr algn="ctr"/>
             <a:r>
@@ -36015,7 +35568,6 @@
             <a:spAutoFit/>
           </a:bodyPr>
           <a:lstStyle/>
-          <a:p/>
           <a:p>
             <a:pPr algn="l"/>
             <a:r>
@@ -36050,7 +35602,6 @@
             <a:spAutoFit/>
           </a:bodyPr>
           <a:lstStyle/>
-          <a:p/>
           <a:p>
             <a:pPr algn="r"/>
             <a:r>
@@ -36189,7 +35740,6 @@
             <a:spAutoFit/>
           </a:bodyPr>
           <a:lstStyle/>
-          <a:p/>
           <a:p>
             <a:pPr algn="l"/>
             <a:r>
@@ -36224,7 +35774,6 @@
             <a:spAutoFit/>
           </a:bodyPr>
           <a:lstStyle/>
-          <a:p/>
           <a:p>
             <a:pPr algn="l"/>
             <a:r>
@@ -36302,7 +35851,6 @@
             <a:spAutoFit/>
           </a:bodyPr>
           <a:lstStyle/>
-          <a:p/>
           <a:p>
             <a:pPr algn="l"/>
             <a:r>
@@ -36380,7 +35928,6 @@
             <a:spAutoFit/>
           </a:bodyPr>
           <a:lstStyle/>
-          <a:p/>
           <a:p>
             <a:pPr algn="l">
               <a:spcBef>
@@ -36642,7 +36189,6 @@
             <a:spAutoFit/>
           </a:bodyPr>
           <a:lstStyle/>
-          <a:p/>
           <a:p>
             <a:pPr algn="l"/>
             <a:r>
@@ -36720,7 +36266,6 @@
             <a:spAutoFit/>
           </a:bodyPr>
           <a:lstStyle/>
-          <a:p/>
           <a:p>
             <a:pPr algn="l">
               <a:spcBef>
@@ -36877,7 +36422,6 @@
             <a:spAutoFit/>
           </a:bodyPr>
           <a:lstStyle/>
-          <a:p/>
           <a:p>
             <a:pPr algn="l"/>
             <a:r>
@@ -36912,7 +36456,6 @@
             <a:spAutoFit/>
           </a:bodyPr>
           <a:lstStyle/>
-          <a:p/>
           <a:p>
             <a:pPr algn="l"/>
             <a:r>
@@ -36947,7 +36490,6 @@
             <a:spAutoFit/>
           </a:bodyPr>
           <a:lstStyle/>
-          <a:p/>
           <a:p>
             <a:pPr algn="l"/>
             <a:r>
@@ -36982,7 +36524,6 @@
             <a:spAutoFit/>
           </a:bodyPr>
           <a:lstStyle/>
-          <a:p/>
           <a:p>
             <a:pPr algn="l"/>
             <a:r>
@@ -37017,7 +36558,6 @@
             <a:spAutoFit/>
           </a:bodyPr>
           <a:lstStyle/>
-          <a:p/>
           <a:p>
             <a:pPr algn="l"/>
             <a:r>
@@ -37052,7 +36592,6 @@
             <a:spAutoFit/>
           </a:bodyPr>
           <a:lstStyle/>
-          <a:p/>
           <a:p>
             <a:pPr algn="l">
               <a:spcBef>
@@ -37121,7 +36660,6 @@
             <a:spAutoFit/>
           </a:bodyPr>
           <a:lstStyle/>
-          <a:p/>
           <a:p>
             <a:pPr algn="r"/>
             <a:r>
@@ -37260,7 +36798,6 @@
             <a:spAutoFit/>
           </a:bodyPr>
           <a:lstStyle/>
-          <a:p/>
           <a:p>
             <a:pPr algn="l"/>
             <a:r>
@@ -37338,7 +36875,6 @@
             <a:spAutoFit/>
           </a:bodyPr>
           <a:lstStyle/>
-          <a:p/>
           <a:p>
             <a:pPr algn="l"/>
             <a:r>
@@ -37373,7 +36909,6 @@
             <a:spAutoFit/>
           </a:bodyPr>
           <a:lstStyle/>
-          <a:p/>
           <a:p>
             <a:pPr algn="l">
               <a:spcBef>
@@ -37515,7 +37050,6 @@
             <a:spAutoFit/>
           </a:bodyPr>
           <a:lstStyle/>
-          <a:p/>
           <a:p>
             <a:pPr algn="l"/>
             <a:r>
@@ -37550,7 +37084,6 @@
             <a:spAutoFit/>
           </a:bodyPr>
           <a:lstStyle/>
-          <a:p/>
           <a:p>
             <a:pPr algn="l">
               <a:spcBef>
@@ -37692,7 +37225,6 @@
             <a:spAutoFit/>
           </a:bodyPr>
           <a:lstStyle/>
-          <a:p/>
           <a:p>
             <a:pPr algn="l"/>
             <a:r>
@@ -37727,7 +37259,6 @@
             <a:spAutoFit/>
           </a:bodyPr>
           <a:lstStyle/>
-          <a:p/>
           <a:p>
             <a:pPr algn="l">
               <a:spcBef>
@@ -37869,7 +37400,6 @@
             <a:spAutoFit/>
           </a:bodyPr>
           <a:lstStyle/>
-          <a:p/>
           <a:p>
             <a:pPr algn="l"/>
             <a:r>
@@ -37904,7 +37434,6 @@
             <a:spAutoFit/>
           </a:bodyPr>
           <a:lstStyle/>
-          <a:p/>
           <a:p>
             <a:pPr algn="l">
               <a:spcBef>
@@ -38046,7 +37575,6 @@
             <a:spAutoFit/>
           </a:bodyPr>
           <a:lstStyle/>
-          <a:p/>
           <a:p>
             <a:pPr algn="l"/>
             <a:r>
@@ -38081,7 +37609,6 @@
             <a:spAutoFit/>
           </a:bodyPr>
           <a:lstStyle/>
-          <a:p/>
           <a:p>
             <a:pPr algn="l">
               <a:spcBef>
@@ -38223,7 +37750,6 @@
             <a:spAutoFit/>
           </a:bodyPr>
           <a:lstStyle/>
-          <a:p/>
           <a:p>
             <a:pPr algn="l"/>
             <a:r>
@@ -38258,7 +37784,6 @@
             <a:spAutoFit/>
           </a:bodyPr>
           <a:lstStyle/>
-          <a:p/>
           <a:p>
             <a:pPr algn="l">
               <a:spcBef>
@@ -38357,7 +37882,6 @@
             <a:spAutoFit/>
           </a:bodyPr>
           <a:lstStyle/>
-          <a:p/>
           <a:p>
             <a:pPr algn="ctr"/>
             <a:r>
@@ -38392,7 +37916,6 @@
             <a:spAutoFit/>
           </a:bodyPr>
           <a:lstStyle/>
-          <a:p/>
           <a:p>
             <a:pPr algn="r"/>
             <a:r>
@@ -38531,7 +38054,6 @@
             <a:spAutoFit/>
           </a:bodyPr>
           <a:lstStyle/>
-          <a:p/>
           <a:p>
             <a:pPr algn="l"/>
             <a:r>
@@ -38566,7 +38088,6 @@
             <a:spAutoFit/>
           </a:bodyPr>
           <a:lstStyle/>
-          <a:p/>
           <a:p>
             <a:pPr algn="l"/>
             <a:r>
@@ -38644,7 +38165,6 @@
             <a:spAutoFit/>
           </a:bodyPr>
           <a:lstStyle/>
-          <a:p/>
           <a:p>
             <a:pPr algn="l"/>
             <a:r>
@@ -38722,7 +38242,6 @@
             <a:spAutoFit/>
           </a:bodyPr>
           <a:lstStyle/>
-          <a:p/>
           <a:p>
             <a:pPr algn="l">
               <a:spcBef>
@@ -38864,7 +38383,6 @@
             <a:spAutoFit/>
           </a:bodyPr>
           <a:lstStyle/>
-          <a:p/>
           <a:p>
             <a:pPr algn="l"/>
             <a:r>
@@ -38942,7 +38460,6 @@
             <a:spAutoFit/>
           </a:bodyPr>
           <a:lstStyle/>
-          <a:p/>
           <a:p>
             <a:pPr algn="l">
               <a:spcBef>
@@ -39084,7 +38601,6 @@
             <a:spAutoFit/>
           </a:bodyPr>
           <a:lstStyle/>
-          <a:p/>
           <a:p>
             <a:pPr algn="l"/>
             <a:r>
@@ -39162,7 +38678,6 @@
             <a:spAutoFit/>
           </a:bodyPr>
           <a:lstStyle/>
-          <a:p/>
           <a:p>
             <a:pPr algn="l">
               <a:spcBef>
@@ -39304,7 +38819,6 @@
             <a:spAutoFit/>
           </a:bodyPr>
           <a:lstStyle/>
-          <a:p/>
           <a:p>
             <a:pPr algn="l"/>
             <a:r>
@@ -39382,7 +38896,6 @@
             <a:spAutoFit/>
           </a:bodyPr>
           <a:lstStyle/>
-          <a:p/>
           <a:p>
             <a:pPr algn="l">
               <a:spcBef>
@@ -39524,7 +39037,6 @@
             <a:spAutoFit/>
           </a:bodyPr>
           <a:lstStyle/>
-          <a:p/>
           <a:p>
             <a:pPr algn="l"/>
             <a:r>
@@ -39559,7 +39071,6 @@
             <a:spAutoFit/>
           </a:bodyPr>
           <a:lstStyle/>
-          <a:p/>
           <a:p>
             <a:pPr algn="l"/>
             <a:r>
@@ -39637,7 +39148,6 @@
             <a:spAutoFit/>
           </a:bodyPr>
           <a:lstStyle/>
-          <a:p/>
           <a:p>
             <a:pPr algn="l"/>
             <a:r>
@@ -39715,7 +39225,6 @@
             <a:spAutoFit/>
           </a:bodyPr>
           <a:lstStyle/>
-          <a:p/>
           <a:p>
             <a:pPr algn="l">
               <a:spcBef>
@@ -39857,7 +39366,6 @@
             <a:spAutoFit/>
           </a:bodyPr>
           <a:lstStyle/>
-          <a:p/>
           <a:p>
             <a:pPr algn="l"/>
             <a:r>
@@ -39935,7 +39443,6 @@
             <a:spAutoFit/>
           </a:bodyPr>
           <a:lstStyle/>
-          <a:p/>
           <a:p>
             <a:pPr algn="l">
               <a:spcBef>
@@ -40034,7 +39541,6 @@
             <a:spAutoFit/>
           </a:bodyPr>
           <a:lstStyle/>
-          <a:p/>
           <a:p>
             <a:pPr algn="r"/>
             <a:r>
@@ -40173,7 +39679,6 @@
             <a:spAutoFit/>
           </a:bodyPr>
           <a:lstStyle/>
-          <a:p/>
           <a:p>
             <a:pPr algn="l"/>
             <a:r>
@@ -40208,7 +39713,6 @@
             <a:spAutoFit/>
           </a:bodyPr>
           <a:lstStyle/>
-          <a:p/>
           <a:p>
             <a:pPr algn="l"/>
             <a:r>
@@ -40286,7 +39790,6 @@
             <a:spAutoFit/>
           </a:bodyPr>
           <a:lstStyle/>
-          <a:p/>
           <a:p>
             <a:pPr algn="l"/>
             <a:r>
@@ -40364,7 +39867,6 @@
             <a:spAutoFit/>
           </a:bodyPr>
           <a:lstStyle/>
-          <a:p/>
           <a:p>
             <a:pPr algn="l"/>
             <a:r>
@@ -40399,7 +39901,6 @@
             <a:spAutoFit/>
           </a:bodyPr>
           <a:lstStyle/>
-          <a:p/>
           <a:p>
             <a:pPr algn="l"/>
             <a:r>
@@ -40434,7 +39935,6 @@
             <a:spAutoFit/>
           </a:bodyPr>
           <a:lstStyle/>
-          <a:p/>
           <a:p>
             <a:pPr algn="l"/>
             <a:r>
@@ -40469,7 +39969,6 @@
             <a:spAutoFit/>
           </a:bodyPr>
           <a:lstStyle/>
-          <a:p/>
           <a:p>
             <a:pPr algn="l"/>
             <a:r>
@@ -40547,7 +40046,6 @@
             <a:spAutoFit/>
           </a:bodyPr>
           <a:lstStyle/>
-          <a:p/>
           <a:p>
             <a:pPr algn="l"/>
             <a:r>
@@ -40582,7 +40080,6 @@
             <a:spAutoFit/>
           </a:bodyPr>
           <a:lstStyle/>
-          <a:p/>
           <a:p>
             <a:pPr algn="l"/>
             <a:r>
@@ -40617,7 +40114,6 @@
             <a:spAutoFit/>
           </a:bodyPr>
           <a:lstStyle/>
-          <a:p/>
           <a:p>
             <a:pPr algn="l"/>
             <a:r>
@@ -40652,7 +40148,6 @@
             <a:spAutoFit/>
           </a:bodyPr>
           <a:lstStyle/>
-          <a:p/>
           <a:p>
             <a:pPr algn="l"/>
             <a:r>
@@ -40730,7 +40225,6 @@
             <a:spAutoFit/>
           </a:bodyPr>
           <a:lstStyle/>
-          <a:p/>
           <a:p>
             <a:pPr algn="l"/>
             <a:r>
@@ -40765,7 +40259,6 @@
             <a:spAutoFit/>
           </a:bodyPr>
           <a:lstStyle/>
-          <a:p/>
           <a:p>
             <a:pPr algn="l"/>
             <a:r>
@@ -40800,7 +40293,6 @@
             <a:spAutoFit/>
           </a:bodyPr>
           <a:lstStyle/>
-          <a:p/>
           <a:p>
             <a:pPr algn="l"/>
             <a:r>
@@ -40835,7 +40327,6 @@
             <a:spAutoFit/>
           </a:bodyPr>
           <a:lstStyle/>
-          <a:p/>
           <a:p>
             <a:pPr algn="l"/>
             <a:r>
@@ -40913,7 +40404,6 @@
             <a:spAutoFit/>
           </a:bodyPr>
           <a:lstStyle/>
-          <a:p/>
           <a:p>
             <a:pPr algn="l"/>
             <a:r>
@@ -40948,7 +40438,6 @@
             <a:spAutoFit/>
           </a:bodyPr>
           <a:lstStyle/>
-          <a:p/>
           <a:p>
             <a:pPr algn="l"/>
             <a:r>
@@ -40983,7 +40472,6 @@
             <a:spAutoFit/>
           </a:bodyPr>
           <a:lstStyle/>
-          <a:p/>
           <a:p>
             <a:pPr algn="l"/>
             <a:r>
@@ -41018,7 +40506,6 @@
             <a:spAutoFit/>
           </a:bodyPr>
           <a:lstStyle/>
-          <a:p/>
           <a:p>
             <a:pPr algn="l"/>
             <a:r>
@@ -41096,7 +40583,6 @@
             <a:spAutoFit/>
           </a:bodyPr>
           <a:lstStyle/>
-          <a:p/>
           <a:p>
             <a:pPr algn="l"/>
             <a:r>
@@ -41131,7 +40617,6 @@
             <a:spAutoFit/>
           </a:bodyPr>
           <a:lstStyle/>
-          <a:p/>
           <a:p>
             <a:pPr algn="l"/>
             <a:r>
@@ -41166,7 +40651,6 @@
             <a:spAutoFit/>
           </a:bodyPr>
           <a:lstStyle/>
-          <a:p/>
           <a:p>
             <a:pPr algn="l"/>
             <a:r>
@@ -41201,7 +40685,6 @@
             <a:spAutoFit/>
           </a:bodyPr>
           <a:lstStyle/>
-          <a:p/>
           <a:p>
             <a:pPr algn="l"/>
             <a:r>
@@ -41279,7 +40762,6 @@
             <a:spAutoFit/>
           </a:bodyPr>
           <a:lstStyle/>
-          <a:p/>
           <a:p>
             <a:pPr algn="l"/>
             <a:r>
@@ -41357,7 +40839,6 @@
             <a:spAutoFit/>
           </a:bodyPr>
           <a:lstStyle/>
-          <a:p/>
           <a:p>
             <a:pPr algn="l"/>
             <a:r>
@@ -41392,7 +40873,6 @@
             <a:spAutoFit/>
           </a:bodyPr>
           <a:lstStyle/>
-          <a:p/>
           <a:p>
             <a:pPr algn="l"/>
             <a:r>
@@ -41427,7 +40907,6 @@
             <a:spAutoFit/>
           </a:bodyPr>
           <a:lstStyle/>
-          <a:p/>
           <a:p>
             <a:pPr algn="l"/>
             <a:r>
@@ -41462,7 +40941,6 @@
             <a:spAutoFit/>
           </a:bodyPr>
           <a:lstStyle/>
-          <a:p/>
           <a:p>
             <a:pPr algn="l"/>
             <a:r>
@@ -41540,7 +41018,6 @@
             <a:spAutoFit/>
           </a:bodyPr>
           <a:lstStyle/>
-          <a:p/>
           <a:p>
             <a:pPr algn="l"/>
             <a:r>
@@ -41575,7 +41052,6 @@
             <a:spAutoFit/>
           </a:bodyPr>
           <a:lstStyle/>
-          <a:p/>
           <a:p>
             <a:pPr algn="l"/>
             <a:r>
@@ -41610,7 +41086,6 @@
             <a:spAutoFit/>
           </a:bodyPr>
           <a:lstStyle/>
-          <a:p/>
           <a:p>
             <a:pPr algn="l"/>
             <a:r>
@@ -41645,7 +41120,6 @@
             <a:spAutoFit/>
           </a:bodyPr>
           <a:lstStyle/>
-          <a:p/>
           <a:p>
             <a:pPr algn="l"/>
             <a:r>
@@ -41723,7 +41197,6 @@
             <a:spAutoFit/>
           </a:bodyPr>
           <a:lstStyle/>
-          <a:p/>
           <a:p>
             <a:pPr algn="l"/>
             <a:r>
@@ -41758,7 +41231,6 @@
             <a:spAutoFit/>
           </a:bodyPr>
           <a:lstStyle/>
-          <a:p/>
           <a:p>
             <a:pPr algn="l"/>
             <a:r>
@@ -41793,7 +41265,6 @@
             <a:spAutoFit/>
           </a:bodyPr>
           <a:lstStyle/>
-          <a:p/>
           <a:p>
             <a:pPr algn="l"/>
             <a:r>
@@ -41828,7 +41299,6 @@
             <a:spAutoFit/>
           </a:bodyPr>
           <a:lstStyle/>
-          <a:p/>
           <a:p>
             <a:pPr algn="l"/>
             <a:r>
@@ -41906,7 +41376,6 @@
             <a:spAutoFit/>
           </a:bodyPr>
           <a:lstStyle/>
-          <a:p/>
           <a:p>
             <a:pPr algn="l"/>
             <a:r>
@@ -41941,7 +41410,6 @@
             <a:spAutoFit/>
           </a:bodyPr>
           <a:lstStyle/>
-          <a:p/>
           <a:p>
             <a:pPr algn="l"/>
             <a:r>
@@ -41976,7 +41444,6 @@
             <a:spAutoFit/>
           </a:bodyPr>
           <a:lstStyle/>
-          <a:p/>
           <a:p>
             <a:pPr algn="l"/>
             <a:r>
@@ -42011,7 +41478,6 @@
             <a:spAutoFit/>
           </a:bodyPr>
           <a:lstStyle/>
-          <a:p/>
           <a:p>
             <a:pPr algn="l"/>
             <a:r>
@@ -42089,7 +41555,6 @@
             <a:spAutoFit/>
           </a:bodyPr>
           <a:lstStyle/>
-          <a:p/>
           <a:p>
             <a:pPr algn="l"/>
             <a:r>
@@ -42124,7 +41589,6 @@
             <a:spAutoFit/>
           </a:bodyPr>
           <a:lstStyle/>
-          <a:p/>
           <a:p>
             <a:pPr algn="l"/>
             <a:r>
@@ -42159,7 +41623,6 @@
             <a:spAutoFit/>
           </a:bodyPr>
           <a:lstStyle/>
-          <a:p/>
           <a:p>
             <a:pPr algn="l"/>
             <a:r>
@@ -42194,7 +41657,6 @@
             <a:spAutoFit/>
           </a:bodyPr>
           <a:lstStyle/>
-          <a:p/>
           <a:p>
             <a:pPr algn="l"/>
             <a:r>
@@ -42272,7 +41734,6 @@
             <a:spAutoFit/>
           </a:bodyPr>
           <a:lstStyle/>
-          <a:p/>
           <a:p>
             <a:pPr algn="l"/>
             <a:r>
@@ -42307,7 +41768,6 @@
             <a:spAutoFit/>
           </a:bodyPr>
           <a:lstStyle/>
-          <a:p/>
           <a:p>
             <a:pPr algn="l"/>
             <a:r>
@@ -42342,7 +41802,6 @@
             <a:spAutoFit/>
           </a:bodyPr>
           <a:lstStyle/>
-          <a:p/>
           <a:p>
             <a:pPr algn="l"/>
             <a:r>
@@ -42377,7 +41836,6 @@
             <a:spAutoFit/>
           </a:bodyPr>
           <a:lstStyle/>
-          <a:p/>
           <a:p>
             <a:pPr algn="l"/>
             <a:r>
@@ -42455,7 +41913,6 @@
             <a:spAutoFit/>
           </a:bodyPr>
           <a:lstStyle/>
-          <a:p/>
           <a:p>
             <a:pPr algn="l"/>
             <a:r>
@@ -42490,7 +41947,6 @@
             <a:spAutoFit/>
           </a:bodyPr>
           <a:lstStyle/>
-          <a:p/>
           <a:p>
             <a:pPr algn="l"/>
             <a:r>
@@ -42525,7 +41981,6 @@
             <a:spAutoFit/>
           </a:bodyPr>
           <a:lstStyle/>
-          <a:p/>
           <a:p>
             <a:pPr algn="l"/>
             <a:r>
@@ -42560,7 +42015,6 @@
             <a:spAutoFit/>
           </a:bodyPr>
           <a:lstStyle/>
-          <a:p/>
           <a:p>
             <a:pPr algn="l"/>
             <a:r>
@@ -42595,7 +42049,6 @@
             <a:spAutoFit/>
           </a:bodyPr>
           <a:lstStyle/>
-          <a:p/>
           <a:p>
             <a:pPr algn="l"/>
             <a:r>
@@ -42630,7 +42083,6 @@
             <a:spAutoFit/>
           </a:bodyPr>
           <a:lstStyle/>
-          <a:p/>
           <a:p>
             <a:pPr algn="r"/>
             <a:r>
@@ -42769,7 +42221,6 @@
             <a:spAutoFit/>
           </a:bodyPr>
           <a:lstStyle/>
-          <a:p/>
           <a:p>
             <a:pPr algn="l"/>
             <a:r>
@@ -42804,7 +42255,6 @@
             <a:spAutoFit/>
           </a:bodyPr>
           <a:lstStyle/>
-          <a:p/>
           <a:p>
             <a:pPr algn="l"/>
             <a:r>
@@ -42882,7 +42332,6 @@
             <a:spAutoFit/>
           </a:bodyPr>
           <a:lstStyle/>
-          <a:p/>
           <a:p>
             <a:pPr algn="l"/>
             <a:r>
@@ -42917,7 +42366,6 @@
             <a:spAutoFit/>
           </a:bodyPr>
           <a:lstStyle/>
-          <a:p/>
           <a:p>
             <a:pPr algn="l"/>
             <a:r>
@@ -42952,7 +42400,6 @@
             <a:spAutoFit/>
           </a:bodyPr>
           <a:lstStyle/>
-          <a:p/>
           <a:p>
             <a:pPr algn="l">
               <a:spcBef>
@@ -43064,7 +42511,6 @@
             <a:spAutoFit/>
           </a:bodyPr>
           <a:lstStyle/>
-          <a:p/>
           <a:p>
             <a:pPr algn="l"/>
             <a:r>
@@ -43099,7 +42545,6 @@
             <a:spAutoFit/>
           </a:bodyPr>
           <a:lstStyle/>
-          <a:p/>
           <a:p>
             <a:pPr algn="l"/>
             <a:r>
@@ -43134,7 +42579,6 @@
             <a:spAutoFit/>
           </a:bodyPr>
           <a:lstStyle/>
-          <a:p/>
           <a:p>
             <a:pPr algn="l">
               <a:spcBef>
@@ -43246,7 +42690,6 @@
             <a:spAutoFit/>
           </a:bodyPr>
           <a:lstStyle/>
-          <a:p/>
           <a:p>
             <a:pPr algn="l"/>
             <a:r>
@@ -43281,7 +42724,6 @@
             <a:spAutoFit/>
           </a:bodyPr>
           <a:lstStyle/>
-          <a:p/>
           <a:p>
             <a:pPr algn="l"/>
             <a:r>
@@ -43316,7 +42758,6 @@
             <a:spAutoFit/>
           </a:bodyPr>
           <a:lstStyle/>
-          <a:p/>
           <a:p>
             <a:pPr algn="l">
               <a:spcBef>
@@ -43428,7 +42869,6 @@
             <a:spAutoFit/>
           </a:bodyPr>
           <a:lstStyle/>
-          <a:p/>
           <a:p>
             <a:pPr algn="l"/>
             <a:r>
@@ -43463,7 +42903,6 @@
             <a:spAutoFit/>
           </a:bodyPr>
           <a:lstStyle/>
-          <a:p/>
           <a:p>
             <a:pPr algn="l"/>
             <a:r>
@@ -43498,7 +42937,6 @@
             <a:spAutoFit/>
           </a:bodyPr>
           <a:lstStyle/>
-          <a:p/>
           <a:p>
             <a:pPr algn="l">
               <a:spcBef>
@@ -43610,7 +43048,6 @@
             <a:spAutoFit/>
           </a:bodyPr>
           <a:lstStyle/>
-          <a:p/>
           <a:p>
             <a:pPr algn="l"/>
             <a:r>
@@ -43645,7 +43082,6 @@
             <a:spAutoFit/>
           </a:bodyPr>
           <a:lstStyle/>
-          <a:p/>
           <a:p>
             <a:pPr algn="l"/>
             <a:r>
@@ -43680,7 +43116,6 @@
             <a:spAutoFit/>
           </a:bodyPr>
           <a:lstStyle/>
-          <a:p/>
           <a:p>
             <a:pPr algn="l">
               <a:spcBef>
@@ -43792,7 +43227,6 @@
             <a:spAutoFit/>
           </a:bodyPr>
           <a:lstStyle/>
-          <a:p/>
           <a:p>
             <a:pPr algn="l"/>
             <a:r>
@@ -43827,7 +43261,6 @@
             <a:spAutoFit/>
           </a:bodyPr>
           <a:lstStyle/>
-          <a:p/>
           <a:p>
             <a:pPr algn="l"/>
             <a:r>
@@ -43862,7 +43295,6 @@
             <a:spAutoFit/>
           </a:bodyPr>
           <a:lstStyle/>
-          <a:p/>
           <a:p>
             <a:pPr algn="l">
               <a:spcBef>
@@ -43931,7 +43363,6 @@
             <a:spAutoFit/>
           </a:bodyPr>
           <a:lstStyle/>
-          <a:p/>
           <a:p>
             <a:pPr algn="l"/>
             <a:r>
@@ -43966,7 +43397,6 @@
             <a:spAutoFit/>
           </a:bodyPr>
           <a:lstStyle/>
-          <a:p/>
           <a:p>
             <a:pPr algn="r"/>
             <a:r>
@@ -44105,7 +43535,6 @@
             <a:spAutoFit/>
           </a:bodyPr>
           <a:lstStyle/>
-          <a:p/>
           <a:p>
             <a:pPr algn="l"/>
             <a:r>
@@ -44140,7 +43569,6 @@
             <a:spAutoFit/>
           </a:bodyPr>
           <a:lstStyle/>
-          <a:p/>
           <a:p>
             <a:pPr algn="l"/>
             <a:r>
@@ -44218,7 +43646,6 @@
             <a:spAutoFit/>
           </a:bodyPr>
           <a:lstStyle/>
-          <a:p/>
           <a:p>
             <a:pPr algn="l"/>
             <a:r>
@@ -44253,7 +43680,6 @@
             <a:spAutoFit/>
           </a:bodyPr>
           <a:lstStyle/>
-          <a:p/>
           <a:p>
             <a:pPr algn="l">
               <a:spcBef>
@@ -44635,7 +44061,6 @@
             <a:spAutoFit/>
           </a:bodyPr>
           <a:lstStyle/>
-          <a:p/>
           <a:p>
             <a:pPr algn="l"/>
             <a:r>
@@ -44670,7 +44095,6 @@
             <a:spAutoFit/>
           </a:bodyPr>
           <a:lstStyle/>
-          <a:p/>
           <a:p>
             <a:pPr algn="l">
               <a:spcBef>
@@ -45054,7 +44478,6 @@
             <a:spAutoFit/>
           </a:bodyPr>
           <a:lstStyle/>
-          <a:p/>
           <a:p>
             <a:pPr algn="r"/>
             <a:r>
@@ -45193,7 +44616,6 @@
             <a:spAutoFit/>
           </a:bodyPr>
           <a:lstStyle/>
-          <a:p/>
           <a:p>
             <a:pPr algn="l"/>
             <a:r>
@@ -45228,7 +44650,6 @@
             <a:spAutoFit/>
           </a:bodyPr>
           <a:lstStyle/>
-          <a:p/>
           <a:p>
             <a:pPr algn="l"/>
             <a:r>
@@ -45306,7 +44727,6 @@
             <a:spAutoFit/>
           </a:bodyPr>
           <a:lstStyle/>
-          <a:p/>
           <a:p>
             <a:pPr algn="l"/>
             <a:r>
@@ -45341,7 +44761,6 @@
             <a:spAutoFit/>
           </a:bodyPr>
           <a:lstStyle/>
-          <a:p/>
           <a:p>
             <a:pPr algn="l">
               <a:spcBef>
@@ -45453,7 +44872,6 @@
             <a:spAutoFit/>
           </a:bodyPr>
           <a:lstStyle/>
-          <a:p/>
           <a:p>
             <a:pPr algn="l"/>
             <a:r>
@@ -45531,7 +44949,6 @@
             <a:spAutoFit/>
           </a:bodyPr>
           <a:lstStyle/>
-          <a:p/>
           <a:p>
             <a:pPr algn="l">
               <a:spcBef>
@@ -45688,7 +45105,6 @@
             <a:spAutoFit/>
           </a:bodyPr>
           <a:lstStyle/>
-          <a:p/>
           <a:p>
             <a:pPr algn="l"/>
             <a:r>
@@ -45766,7 +45182,6 @@
             <a:spAutoFit/>
           </a:bodyPr>
           <a:lstStyle/>
-          <a:p/>
           <a:p>
             <a:pPr algn="l">
               <a:spcBef>
@@ -45923,7 +45338,6 @@
             <a:spAutoFit/>
           </a:bodyPr>
           <a:lstStyle/>
-          <a:p/>
           <a:p>
             <a:pPr algn="l"/>
             <a:r>
@@ -46001,7 +45415,6 @@
             <a:spAutoFit/>
           </a:bodyPr>
           <a:lstStyle/>
-          <a:p/>
           <a:p>
             <a:pPr algn="l">
               <a:spcBef>
@@ -46158,7 +45571,6 @@
             <a:spAutoFit/>
           </a:bodyPr>
           <a:lstStyle/>
-          <a:p/>
           <a:p>
             <a:pPr algn="l"/>
             <a:r>
@@ -46193,7 +45605,6 @@
             <a:spAutoFit/>
           </a:bodyPr>
           <a:lstStyle/>
-          <a:p/>
           <a:p>
             <a:pPr algn="l">
               <a:spcBef>
@@ -46277,7 +45688,6 @@
             <a:spAutoFit/>
           </a:bodyPr>
           <a:lstStyle/>
-          <a:p/>
           <a:p>
             <a:pPr algn="r"/>
             <a:r>
@@ -46416,7 +45826,6 @@
             <a:spAutoFit/>
           </a:bodyPr>
           <a:lstStyle/>
-          <a:p/>
           <a:p>
             <a:pPr algn="l"/>
             <a:r>
@@ -46451,7 +45860,6 @@
             <a:spAutoFit/>
           </a:bodyPr>
           <a:lstStyle/>
-          <a:p/>
           <a:p>
             <a:pPr algn="l"/>
             <a:r>
@@ -46529,7 +45937,6 @@
             <a:spAutoFit/>
           </a:bodyPr>
           <a:lstStyle/>
-          <a:p/>
           <a:p>
             <a:pPr algn="l"/>
             <a:r>
@@ -46607,7 +46014,6 @@
             <a:spAutoFit/>
           </a:bodyPr>
           <a:lstStyle/>
-          <a:p/>
           <a:p>
             <a:pPr algn="l">
               <a:spcBef>
@@ -46809,7 +46215,6 @@
             <a:spAutoFit/>
           </a:bodyPr>
           <a:lstStyle/>
-          <a:p/>
           <a:p>
             <a:pPr algn="l"/>
             <a:r>
@@ -46887,7 +46292,6 @@
             <a:spAutoFit/>
           </a:bodyPr>
           <a:lstStyle/>
-          <a:p/>
           <a:p>
             <a:pPr algn="l">
               <a:spcBef>
@@ -47089,7 +46493,6 @@
             <a:spAutoFit/>
           </a:bodyPr>
           <a:lstStyle/>
-          <a:p/>
           <a:p>
             <a:pPr algn="l"/>
             <a:r>
@@ -47124,7 +46527,6 @@
             <a:spAutoFit/>
           </a:bodyPr>
           <a:lstStyle/>
-          <a:p/>
           <a:p>
             <a:pPr algn="l">
               <a:spcBef>
@@ -47236,7 +46638,6 @@
             <a:spAutoFit/>
           </a:bodyPr>
           <a:lstStyle/>
-          <a:p/>
           <a:p>
             <a:pPr algn="l"/>
             <a:r>
@@ -47314,7 +46715,6 @@
             <a:spAutoFit/>
           </a:bodyPr>
           <a:lstStyle/>
-          <a:p/>
           <a:p>
             <a:pPr algn="l">
               <a:spcBef>
@@ -47471,7 +46871,6 @@
             <a:spAutoFit/>
           </a:bodyPr>
           <a:lstStyle/>
-          <a:p/>
           <a:p>
             <a:pPr algn="l"/>
             <a:r>
@@ -47549,7 +46948,6 @@
             <a:spAutoFit/>
           </a:bodyPr>
           <a:lstStyle/>
-          <a:p/>
           <a:p>
             <a:pPr algn="l">
               <a:spcBef>
@@ -47663,7 +47061,6 @@
             <a:spAutoFit/>
           </a:bodyPr>
           <a:lstStyle/>
-          <a:p/>
           <a:p>
             <a:pPr algn="r"/>
             <a:r>
